--- a/skills/ppt-creator/templates/financial_analysis_deck.pptx
+++ b/skills/ppt-creator/templates/financial_analysis_deck.pptx
@@ -3104,14 +3104,100 @@
       <p:grpSpPr/>
       <p:sp>
         <p:nvSpPr>
-          <p:cNvPr id="2" name="TextBox 1"/>
+          <p:cNvPr id="2" name="Rectangle 1"/>
+          <p:cNvSpPr/>
+          <p:nvPr/>
+        </p:nvSpPr>
+        <p:spPr>
+          <a:xfrm>
+            <a:off x="0" y="0"/>
+            <a:ext cx="7315200" cy="6858000"/>
+          </a:xfrm>
+          <a:prstGeom prst="rect">
+            <a:avLst/>
+          </a:prstGeom>
+          <a:solidFill>
+            <a:srgbClr val="1B2A4A"/>
+          </a:solidFill>
+          <a:ln>
+            <a:noFill/>
+          </a:ln>
+        </p:spPr>
+        <p:style>
+          <a:lnRef idx="1">
+            <a:schemeClr val="accent1"/>
+          </a:lnRef>
+          <a:fillRef idx="3">
+            <a:schemeClr val="accent1"/>
+          </a:fillRef>
+          <a:effectRef idx="2">
+            <a:schemeClr val="accent1"/>
+          </a:effectRef>
+          <a:fontRef idx="minor">
+            <a:schemeClr val="lt1"/>
+          </a:fontRef>
+        </p:style>
+        <p:txBody>
+          <a:bodyPr rtlCol="0" anchor="ctr"/>
+          <a:lstStyle/>
+          <a:p>
+            <a:pPr algn="ctr"/>
+          </a:p>
+        </p:txBody>
+      </p:sp>
+      <p:sp>
+        <p:nvSpPr>
+          <p:cNvPr id="3" name="Rectangle 2"/>
+          <p:cNvSpPr/>
+          <p:nvPr/>
+        </p:nvSpPr>
+        <p:spPr>
+          <a:xfrm>
+            <a:off x="7315200" y="0"/>
+            <a:ext cx="54864" cy="6858000"/>
+          </a:xfrm>
+          <a:prstGeom prst="rect">
+            <a:avLst/>
+          </a:prstGeom>
+          <a:solidFill>
+            <a:srgbClr val="C5A55A"/>
+          </a:solidFill>
+          <a:ln>
+            <a:noFill/>
+          </a:ln>
+        </p:spPr>
+        <p:style>
+          <a:lnRef idx="1">
+            <a:schemeClr val="accent1"/>
+          </a:lnRef>
+          <a:fillRef idx="3">
+            <a:schemeClr val="accent1"/>
+          </a:fillRef>
+          <a:effectRef idx="2">
+            <a:schemeClr val="accent1"/>
+          </a:effectRef>
+          <a:fontRef idx="minor">
+            <a:schemeClr val="lt1"/>
+          </a:fontRef>
+        </p:style>
+        <p:txBody>
+          <a:bodyPr rtlCol="0" anchor="ctr"/>
+          <a:lstStyle/>
+          <a:p>
+            <a:pPr algn="ctr"/>
+          </a:p>
+        </p:txBody>
+      </p:sp>
+      <p:sp>
+        <p:nvSpPr>
+          <p:cNvPr id="4" name="TextBox 3"/>
           <p:cNvSpPr txBox="1"/>
           <p:nvPr/>
         </p:nvSpPr>
         <p:spPr>
           <a:xfrm>
-            <a:off x="457200" y="365760"/>
-            <a:ext cx="11247120" cy="822960"/>
+            <a:off x="1097280" y="2011680"/>
+            <a:ext cx="8229600" cy="1371600"/>
           </a:xfrm>
           <a:prstGeom prst="rect">
             <a:avLst/>
@@ -3119,18 +3205,65 @@
           <a:noFill/>
         </p:spPr>
         <p:txBody>
-          <a:bodyPr wrap="none">
-            <a:spAutoFit/>
-          </a:bodyPr>
-          <a:lstStyle/>
-          <a:p>
-            <a:r>
-              <a:rPr sz="2400" b="1">
+          <a:bodyPr wrap="square"/>
+          <a:lstStyle/>
+          <a:p>
+            <a:pPr algn="l">
+              <a:spcBef>
+                <a:spcPts val="0"/>
+              </a:spcBef>
+              <a:spcAft>
+                <a:spcPts val="0"/>
+              </a:spcAft>
+            </a:pPr>
+            <a:r>
+              <a:rPr sz="3600" b="1">
                 <a:solidFill>
-                  <a:srgbClr val="0B3D91"/>
+                  <a:srgbClr val="FFFFFF"/>
                 </a:solidFill>
+                <a:latin typeface="Calibri"/>
               </a:rPr>
-              <a:t>[1/15] Title</a:t>
+              <a:t>[financial_analysis_deck]</a:t>
+            </a:r>
+          </a:p>
+        </p:txBody>
+      </p:sp>
+      <p:sp>
+        <p:nvSpPr>
+          <p:cNvPr id="5" name="TextBox 4"/>
+          <p:cNvSpPr txBox="1"/>
+          <p:nvPr/>
+        </p:nvSpPr>
+        <p:spPr>
+          <a:xfrm>
+            <a:off x="1097280" y="3474720"/>
+            <a:ext cx="8229600" cy="731520"/>
+          </a:xfrm>
+          <a:prstGeom prst="rect">
+            <a:avLst/>
+          </a:prstGeom>
+          <a:noFill/>
+        </p:spPr>
+        <p:txBody>
+          <a:bodyPr wrap="square"/>
+          <a:lstStyle/>
+          <a:p>
+            <a:pPr algn="l">
+              <a:spcBef>
+                <a:spcPts val="0"/>
+              </a:spcBef>
+              <a:spcAft>
+                <a:spcPts val="0"/>
+              </a:spcAft>
+            </a:pPr>
+            <a:r>
+              <a:rPr sz="1800" b="0">
+                <a:solidFill>
+                  <a:srgbClr val="C5A55A"/>
+                </a:solidFill>
+                <a:latin typeface="Calibri"/>
+              </a:rPr>
+              <a:t>Template — 15 slides</a:t>
             </a:r>
           </a:p>
         </p:txBody>
@@ -3155,14 +3288,143 @@
       <p:grpSpPr/>
       <p:sp>
         <p:nvSpPr>
-          <p:cNvPr id="2" name="TextBox 1"/>
+          <p:cNvPr id="2" name="Rectangle 1"/>
+          <p:cNvSpPr/>
+          <p:nvPr/>
+        </p:nvSpPr>
+        <p:spPr>
+          <a:xfrm>
+            <a:off x="0" y="0"/>
+            <a:ext cx="320040" cy="6858000"/>
+          </a:xfrm>
+          <a:prstGeom prst="rect">
+            <a:avLst/>
+          </a:prstGeom>
+          <a:solidFill>
+            <a:srgbClr val="1B2A4A"/>
+          </a:solidFill>
+          <a:ln>
+            <a:noFill/>
+          </a:ln>
+        </p:spPr>
+        <p:style>
+          <a:lnRef idx="1">
+            <a:schemeClr val="accent1"/>
+          </a:lnRef>
+          <a:fillRef idx="3">
+            <a:schemeClr val="accent1"/>
+          </a:fillRef>
+          <a:effectRef idx="2">
+            <a:schemeClr val="accent1"/>
+          </a:effectRef>
+          <a:fontRef idx="minor">
+            <a:schemeClr val="lt1"/>
+          </a:fontRef>
+        </p:style>
+        <p:txBody>
+          <a:bodyPr rtlCol="0" anchor="ctr"/>
+          <a:lstStyle/>
+          <a:p>
+            <a:pPr algn="ctr"/>
+          </a:p>
+        </p:txBody>
+      </p:sp>
+      <p:sp>
+        <p:nvSpPr>
+          <p:cNvPr id="3" name="Rectangle 2"/>
+          <p:cNvSpPr/>
+          <p:nvPr/>
+        </p:nvSpPr>
+        <p:spPr>
+          <a:xfrm>
+            <a:off x="320040" y="0"/>
+            <a:ext cx="11871655" cy="36576"/>
+          </a:xfrm>
+          <a:prstGeom prst="rect">
+            <a:avLst/>
+          </a:prstGeom>
+          <a:solidFill>
+            <a:srgbClr val="C5A55A"/>
+          </a:solidFill>
+          <a:ln>
+            <a:noFill/>
+          </a:ln>
+        </p:spPr>
+        <p:style>
+          <a:lnRef idx="1">
+            <a:schemeClr val="accent1"/>
+          </a:lnRef>
+          <a:fillRef idx="3">
+            <a:schemeClr val="accent1"/>
+          </a:fillRef>
+          <a:effectRef idx="2">
+            <a:schemeClr val="accent1"/>
+          </a:effectRef>
+          <a:fontRef idx="minor">
+            <a:schemeClr val="lt1"/>
+          </a:fontRef>
+        </p:style>
+        <p:txBody>
+          <a:bodyPr rtlCol="0" anchor="ctr"/>
+          <a:lstStyle/>
+          <a:p>
+            <a:pPr algn="ctr"/>
+          </a:p>
+        </p:txBody>
+      </p:sp>
+      <p:sp>
+        <p:nvSpPr>
+          <p:cNvPr id="4" name="Rectangle 3"/>
+          <p:cNvSpPr/>
+          <p:nvPr/>
+        </p:nvSpPr>
+        <p:spPr>
+          <a:xfrm>
+            <a:off x="320040" y="36576"/>
+            <a:ext cx="11871655" cy="1005840"/>
+          </a:xfrm>
+          <a:prstGeom prst="rect">
+            <a:avLst/>
+          </a:prstGeom>
+          <a:solidFill>
+            <a:srgbClr val="F5F3EF"/>
+          </a:solidFill>
+          <a:ln>
+            <a:noFill/>
+          </a:ln>
+        </p:spPr>
+        <p:style>
+          <a:lnRef idx="1">
+            <a:schemeClr val="accent1"/>
+          </a:lnRef>
+          <a:fillRef idx="3">
+            <a:schemeClr val="accent1"/>
+          </a:fillRef>
+          <a:effectRef idx="2">
+            <a:schemeClr val="accent1"/>
+          </a:effectRef>
+          <a:fontRef idx="minor">
+            <a:schemeClr val="lt1"/>
+          </a:fontRef>
+        </p:style>
+        <p:txBody>
+          <a:bodyPr rtlCol="0" anchor="ctr"/>
+          <a:lstStyle/>
+          <a:p>
+            <a:pPr algn="ctr"/>
+          </a:p>
+        </p:txBody>
+      </p:sp>
+      <p:sp>
+        <p:nvSpPr>
+          <p:cNvPr id="5" name="TextBox 4"/>
           <p:cNvSpPr txBox="1"/>
           <p:nvPr/>
         </p:nvSpPr>
         <p:spPr>
           <a:xfrm>
-            <a:off x="457200" y="365760"/>
-            <a:ext cx="11247120" cy="822960"/>
+            <a:off x="822960" y="164592"/>
+            <a:ext cx="10515600" cy="731520"/>
           </a:xfrm>
           <a:prstGeom prst="rect">
             <a:avLst/>
@@ -3170,18 +3432,191 @@
           <a:noFill/>
         </p:spPr>
         <p:txBody>
-          <a:bodyPr wrap="none">
-            <a:spAutoFit/>
-          </a:bodyPr>
-          <a:lstStyle/>
-          <a:p>
-            <a:r>
-              <a:rPr sz="2400" b="1">
+          <a:bodyPr wrap="square"/>
+          <a:lstStyle/>
+          <a:p>
+            <a:pPr algn="l">
+              <a:spcBef>
+                <a:spcPts val="0"/>
+              </a:spcBef>
+              <a:spcAft>
+                <a:spcPts val="0"/>
+              </a:spcAft>
+            </a:pPr>
+            <a:r>
+              <a:rPr sz="2200" b="1">
                 <a:solidFill>
-                  <a:srgbClr val="0B3D91"/>
+                  <a:srgbClr val="1B2A4A"/>
                 </a:solidFill>
+                <a:latin typeface="Calibri"/>
               </a:rPr>
               <a:t>[10/15] Bull case</a:t>
+            </a:r>
+          </a:p>
+        </p:txBody>
+      </p:sp>
+      <p:sp>
+        <p:nvSpPr>
+          <p:cNvPr id="6" name="Rectangle 5"/>
+          <p:cNvSpPr/>
+          <p:nvPr/>
+        </p:nvSpPr>
+        <p:spPr>
+          <a:xfrm>
+            <a:off x="822960" y="1042415"/>
+            <a:ext cx="10058400" cy="18288"/>
+          </a:xfrm>
+          <a:prstGeom prst="rect">
+            <a:avLst/>
+          </a:prstGeom>
+          <a:solidFill>
+            <a:srgbClr val="6C757D"/>
+          </a:solidFill>
+          <a:ln>
+            <a:noFill/>
+          </a:ln>
+        </p:spPr>
+        <p:style>
+          <a:lnRef idx="1">
+            <a:schemeClr val="accent1"/>
+          </a:lnRef>
+          <a:fillRef idx="3">
+            <a:schemeClr val="accent1"/>
+          </a:fillRef>
+          <a:effectRef idx="2">
+            <a:schemeClr val="accent1"/>
+          </a:effectRef>
+          <a:fontRef idx="minor">
+            <a:schemeClr val="lt1"/>
+          </a:fontRef>
+        </p:style>
+        <p:txBody>
+          <a:bodyPr rtlCol="0" anchor="ctr"/>
+          <a:lstStyle/>
+          <a:p>
+            <a:pPr algn="ctr"/>
+          </a:p>
+        </p:txBody>
+      </p:sp>
+      <p:sp>
+        <p:nvSpPr>
+          <p:cNvPr id="7" name="Rectangle 6"/>
+          <p:cNvSpPr/>
+          <p:nvPr/>
+        </p:nvSpPr>
+        <p:spPr>
+          <a:xfrm>
+            <a:off x="822960" y="6446520"/>
+            <a:ext cx="10515600" cy="9144"/>
+          </a:xfrm>
+          <a:prstGeom prst="rect">
+            <a:avLst/>
+          </a:prstGeom>
+          <a:solidFill>
+            <a:srgbClr val="6C757D"/>
+          </a:solidFill>
+          <a:ln>
+            <a:noFill/>
+          </a:ln>
+        </p:spPr>
+        <p:style>
+          <a:lnRef idx="1">
+            <a:schemeClr val="accent1"/>
+          </a:lnRef>
+          <a:fillRef idx="3">
+            <a:schemeClr val="accent1"/>
+          </a:fillRef>
+          <a:effectRef idx="2">
+            <a:schemeClr val="accent1"/>
+          </a:effectRef>
+          <a:fontRef idx="minor">
+            <a:schemeClr val="lt1"/>
+          </a:fontRef>
+        </p:style>
+        <p:txBody>
+          <a:bodyPr rtlCol="0" anchor="ctr"/>
+          <a:lstStyle/>
+          <a:p>
+            <a:pPr algn="ctr"/>
+          </a:p>
+        </p:txBody>
+      </p:sp>
+      <p:sp>
+        <p:nvSpPr>
+          <p:cNvPr id="8" name="TextBox 7"/>
+          <p:cNvSpPr txBox="1"/>
+          <p:nvPr/>
+        </p:nvSpPr>
+        <p:spPr>
+          <a:xfrm>
+            <a:off x="11155680" y="6492240"/>
+            <a:ext cx="731520" cy="274320"/>
+          </a:xfrm>
+          <a:prstGeom prst="rect">
+            <a:avLst/>
+          </a:prstGeom>
+          <a:noFill/>
+        </p:spPr>
+        <p:txBody>
+          <a:bodyPr wrap="square"/>
+          <a:lstStyle/>
+          <a:p>
+            <a:pPr algn="r">
+              <a:spcBef>
+                <a:spcPts val="0"/>
+              </a:spcBef>
+              <a:spcAft>
+                <a:spcPts val="0"/>
+              </a:spcAft>
+            </a:pPr>
+            <a:r>
+              <a:rPr sz="900" b="0">
+                <a:solidFill>
+                  <a:srgbClr val="6C757D"/>
+                </a:solidFill>
+                <a:latin typeface="Calibri"/>
+              </a:rPr>
+              <a:t>10/15</a:t>
+            </a:r>
+          </a:p>
+        </p:txBody>
+      </p:sp>
+      <p:sp>
+        <p:nvSpPr>
+          <p:cNvPr id="9" name="TextBox 8"/>
+          <p:cNvSpPr txBox="1"/>
+          <p:nvPr/>
+        </p:nvSpPr>
+        <p:spPr>
+          <a:xfrm>
+            <a:off x="822960" y="6492240"/>
+            <a:ext cx="2743200" cy="274320"/>
+          </a:xfrm>
+          <a:prstGeom prst="rect">
+            <a:avLst/>
+          </a:prstGeom>
+          <a:noFill/>
+        </p:spPr>
+        <p:txBody>
+          <a:bodyPr wrap="square"/>
+          <a:lstStyle/>
+          <a:p>
+            <a:pPr algn="l">
+              <a:spcBef>
+                <a:spcPts val="0"/>
+              </a:spcBef>
+              <a:spcAft>
+                <a:spcPts val="0"/>
+              </a:spcAft>
+            </a:pPr>
+            <a:r>
+              <a:rPr sz="800" b="0">
+                <a:solidFill>
+                  <a:srgbClr val="6C757D"/>
+                </a:solidFill>
+                <a:latin typeface="Calibri"/>
+              </a:rPr>
+              <a:t>CONFIDENTIEL</a:t>
             </a:r>
           </a:p>
         </p:txBody>
@@ -3206,14 +3641,143 @@
       <p:grpSpPr/>
       <p:sp>
         <p:nvSpPr>
-          <p:cNvPr id="2" name="TextBox 1"/>
+          <p:cNvPr id="2" name="Rectangle 1"/>
+          <p:cNvSpPr/>
+          <p:nvPr/>
+        </p:nvSpPr>
+        <p:spPr>
+          <a:xfrm>
+            <a:off x="0" y="0"/>
+            <a:ext cx="320040" cy="6858000"/>
+          </a:xfrm>
+          <a:prstGeom prst="rect">
+            <a:avLst/>
+          </a:prstGeom>
+          <a:solidFill>
+            <a:srgbClr val="1B2A4A"/>
+          </a:solidFill>
+          <a:ln>
+            <a:noFill/>
+          </a:ln>
+        </p:spPr>
+        <p:style>
+          <a:lnRef idx="1">
+            <a:schemeClr val="accent1"/>
+          </a:lnRef>
+          <a:fillRef idx="3">
+            <a:schemeClr val="accent1"/>
+          </a:fillRef>
+          <a:effectRef idx="2">
+            <a:schemeClr val="accent1"/>
+          </a:effectRef>
+          <a:fontRef idx="minor">
+            <a:schemeClr val="lt1"/>
+          </a:fontRef>
+        </p:style>
+        <p:txBody>
+          <a:bodyPr rtlCol="0" anchor="ctr"/>
+          <a:lstStyle/>
+          <a:p>
+            <a:pPr algn="ctr"/>
+          </a:p>
+        </p:txBody>
+      </p:sp>
+      <p:sp>
+        <p:nvSpPr>
+          <p:cNvPr id="3" name="Rectangle 2"/>
+          <p:cNvSpPr/>
+          <p:nvPr/>
+        </p:nvSpPr>
+        <p:spPr>
+          <a:xfrm>
+            <a:off x="320040" y="0"/>
+            <a:ext cx="11871655" cy="36576"/>
+          </a:xfrm>
+          <a:prstGeom prst="rect">
+            <a:avLst/>
+          </a:prstGeom>
+          <a:solidFill>
+            <a:srgbClr val="C5A55A"/>
+          </a:solidFill>
+          <a:ln>
+            <a:noFill/>
+          </a:ln>
+        </p:spPr>
+        <p:style>
+          <a:lnRef idx="1">
+            <a:schemeClr val="accent1"/>
+          </a:lnRef>
+          <a:fillRef idx="3">
+            <a:schemeClr val="accent1"/>
+          </a:fillRef>
+          <a:effectRef idx="2">
+            <a:schemeClr val="accent1"/>
+          </a:effectRef>
+          <a:fontRef idx="minor">
+            <a:schemeClr val="lt1"/>
+          </a:fontRef>
+        </p:style>
+        <p:txBody>
+          <a:bodyPr rtlCol="0" anchor="ctr"/>
+          <a:lstStyle/>
+          <a:p>
+            <a:pPr algn="ctr"/>
+          </a:p>
+        </p:txBody>
+      </p:sp>
+      <p:sp>
+        <p:nvSpPr>
+          <p:cNvPr id="4" name="Rectangle 3"/>
+          <p:cNvSpPr/>
+          <p:nvPr/>
+        </p:nvSpPr>
+        <p:spPr>
+          <a:xfrm>
+            <a:off x="320040" y="36576"/>
+            <a:ext cx="11871655" cy="1005840"/>
+          </a:xfrm>
+          <a:prstGeom prst="rect">
+            <a:avLst/>
+          </a:prstGeom>
+          <a:solidFill>
+            <a:srgbClr val="F5F3EF"/>
+          </a:solidFill>
+          <a:ln>
+            <a:noFill/>
+          </a:ln>
+        </p:spPr>
+        <p:style>
+          <a:lnRef idx="1">
+            <a:schemeClr val="accent1"/>
+          </a:lnRef>
+          <a:fillRef idx="3">
+            <a:schemeClr val="accent1"/>
+          </a:fillRef>
+          <a:effectRef idx="2">
+            <a:schemeClr val="accent1"/>
+          </a:effectRef>
+          <a:fontRef idx="minor">
+            <a:schemeClr val="lt1"/>
+          </a:fontRef>
+        </p:style>
+        <p:txBody>
+          <a:bodyPr rtlCol="0" anchor="ctr"/>
+          <a:lstStyle/>
+          <a:p>
+            <a:pPr algn="ctr"/>
+          </a:p>
+        </p:txBody>
+      </p:sp>
+      <p:sp>
+        <p:nvSpPr>
+          <p:cNvPr id="5" name="TextBox 4"/>
           <p:cNvSpPr txBox="1"/>
           <p:nvPr/>
         </p:nvSpPr>
         <p:spPr>
           <a:xfrm>
-            <a:off x="457200" y="365760"/>
-            <a:ext cx="11247120" cy="822960"/>
+            <a:off x="822960" y="164592"/>
+            <a:ext cx="10515600" cy="731520"/>
           </a:xfrm>
           <a:prstGeom prst="rect">
             <a:avLst/>
@@ -3221,18 +3785,191 @@
           <a:noFill/>
         </p:spPr>
         <p:txBody>
-          <a:bodyPr wrap="none">
-            <a:spAutoFit/>
-          </a:bodyPr>
-          <a:lstStyle/>
-          <a:p>
-            <a:r>
-              <a:rPr sz="2400" b="1">
+          <a:bodyPr wrap="square"/>
+          <a:lstStyle/>
+          <a:p>
+            <a:pPr algn="l">
+              <a:spcBef>
+                <a:spcPts val="0"/>
+              </a:spcBef>
+              <a:spcAft>
+                <a:spcPts val="0"/>
+              </a:spcAft>
+            </a:pPr>
+            <a:r>
+              <a:rPr sz="2200" b="1">
                 <a:solidFill>
-                  <a:srgbClr val="0B3D91"/>
+                  <a:srgbClr val="1B2A4A"/>
                 </a:solidFill>
+                <a:latin typeface="Calibri"/>
               </a:rPr>
               <a:t>[11/15] Base case</a:t>
+            </a:r>
+          </a:p>
+        </p:txBody>
+      </p:sp>
+      <p:sp>
+        <p:nvSpPr>
+          <p:cNvPr id="6" name="Rectangle 5"/>
+          <p:cNvSpPr/>
+          <p:nvPr/>
+        </p:nvSpPr>
+        <p:spPr>
+          <a:xfrm>
+            <a:off x="822960" y="1042415"/>
+            <a:ext cx="10058400" cy="18288"/>
+          </a:xfrm>
+          <a:prstGeom prst="rect">
+            <a:avLst/>
+          </a:prstGeom>
+          <a:solidFill>
+            <a:srgbClr val="6C757D"/>
+          </a:solidFill>
+          <a:ln>
+            <a:noFill/>
+          </a:ln>
+        </p:spPr>
+        <p:style>
+          <a:lnRef idx="1">
+            <a:schemeClr val="accent1"/>
+          </a:lnRef>
+          <a:fillRef idx="3">
+            <a:schemeClr val="accent1"/>
+          </a:fillRef>
+          <a:effectRef idx="2">
+            <a:schemeClr val="accent1"/>
+          </a:effectRef>
+          <a:fontRef idx="minor">
+            <a:schemeClr val="lt1"/>
+          </a:fontRef>
+        </p:style>
+        <p:txBody>
+          <a:bodyPr rtlCol="0" anchor="ctr"/>
+          <a:lstStyle/>
+          <a:p>
+            <a:pPr algn="ctr"/>
+          </a:p>
+        </p:txBody>
+      </p:sp>
+      <p:sp>
+        <p:nvSpPr>
+          <p:cNvPr id="7" name="Rectangle 6"/>
+          <p:cNvSpPr/>
+          <p:nvPr/>
+        </p:nvSpPr>
+        <p:spPr>
+          <a:xfrm>
+            <a:off x="822960" y="6446520"/>
+            <a:ext cx="10515600" cy="9144"/>
+          </a:xfrm>
+          <a:prstGeom prst="rect">
+            <a:avLst/>
+          </a:prstGeom>
+          <a:solidFill>
+            <a:srgbClr val="6C757D"/>
+          </a:solidFill>
+          <a:ln>
+            <a:noFill/>
+          </a:ln>
+        </p:spPr>
+        <p:style>
+          <a:lnRef idx="1">
+            <a:schemeClr val="accent1"/>
+          </a:lnRef>
+          <a:fillRef idx="3">
+            <a:schemeClr val="accent1"/>
+          </a:fillRef>
+          <a:effectRef idx="2">
+            <a:schemeClr val="accent1"/>
+          </a:effectRef>
+          <a:fontRef idx="minor">
+            <a:schemeClr val="lt1"/>
+          </a:fontRef>
+        </p:style>
+        <p:txBody>
+          <a:bodyPr rtlCol="0" anchor="ctr"/>
+          <a:lstStyle/>
+          <a:p>
+            <a:pPr algn="ctr"/>
+          </a:p>
+        </p:txBody>
+      </p:sp>
+      <p:sp>
+        <p:nvSpPr>
+          <p:cNvPr id="8" name="TextBox 7"/>
+          <p:cNvSpPr txBox="1"/>
+          <p:nvPr/>
+        </p:nvSpPr>
+        <p:spPr>
+          <a:xfrm>
+            <a:off x="11155680" y="6492240"/>
+            <a:ext cx="731520" cy="274320"/>
+          </a:xfrm>
+          <a:prstGeom prst="rect">
+            <a:avLst/>
+          </a:prstGeom>
+          <a:noFill/>
+        </p:spPr>
+        <p:txBody>
+          <a:bodyPr wrap="square"/>
+          <a:lstStyle/>
+          <a:p>
+            <a:pPr algn="r">
+              <a:spcBef>
+                <a:spcPts val="0"/>
+              </a:spcBef>
+              <a:spcAft>
+                <a:spcPts val="0"/>
+              </a:spcAft>
+            </a:pPr>
+            <a:r>
+              <a:rPr sz="900" b="0">
+                <a:solidFill>
+                  <a:srgbClr val="6C757D"/>
+                </a:solidFill>
+                <a:latin typeface="Calibri"/>
+              </a:rPr>
+              <a:t>11/15</a:t>
+            </a:r>
+          </a:p>
+        </p:txBody>
+      </p:sp>
+      <p:sp>
+        <p:nvSpPr>
+          <p:cNvPr id="9" name="TextBox 8"/>
+          <p:cNvSpPr txBox="1"/>
+          <p:nvPr/>
+        </p:nvSpPr>
+        <p:spPr>
+          <a:xfrm>
+            <a:off x="822960" y="6492240"/>
+            <a:ext cx="2743200" cy="274320"/>
+          </a:xfrm>
+          <a:prstGeom prst="rect">
+            <a:avLst/>
+          </a:prstGeom>
+          <a:noFill/>
+        </p:spPr>
+        <p:txBody>
+          <a:bodyPr wrap="square"/>
+          <a:lstStyle/>
+          <a:p>
+            <a:pPr algn="l">
+              <a:spcBef>
+                <a:spcPts val="0"/>
+              </a:spcBef>
+              <a:spcAft>
+                <a:spcPts val="0"/>
+              </a:spcAft>
+            </a:pPr>
+            <a:r>
+              <a:rPr sz="800" b="0">
+                <a:solidFill>
+                  <a:srgbClr val="6C757D"/>
+                </a:solidFill>
+                <a:latin typeface="Calibri"/>
+              </a:rPr>
+              <a:t>CONFIDENTIEL</a:t>
             </a:r>
           </a:p>
         </p:txBody>
@@ -3257,14 +3994,143 @@
       <p:grpSpPr/>
       <p:sp>
         <p:nvSpPr>
-          <p:cNvPr id="2" name="TextBox 1"/>
+          <p:cNvPr id="2" name="Rectangle 1"/>
+          <p:cNvSpPr/>
+          <p:nvPr/>
+        </p:nvSpPr>
+        <p:spPr>
+          <a:xfrm>
+            <a:off x="0" y="0"/>
+            <a:ext cx="320040" cy="6858000"/>
+          </a:xfrm>
+          <a:prstGeom prst="rect">
+            <a:avLst/>
+          </a:prstGeom>
+          <a:solidFill>
+            <a:srgbClr val="1B2A4A"/>
+          </a:solidFill>
+          <a:ln>
+            <a:noFill/>
+          </a:ln>
+        </p:spPr>
+        <p:style>
+          <a:lnRef idx="1">
+            <a:schemeClr val="accent1"/>
+          </a:lnRef>
+          <a:fillRef idx="3">
+            <a:schemeClr val="accent1"/>
+          </a:fillRef>
+          <a:effectRef idx="2">
+            <a:schemeClr val="accent1"/>
+          </a:effectRef>
+          <a:fontRef idx="minor">
+            <a:schemeClr val="lt1"/>
+          </a:fontRef>
+        </p:style>
+        <p:txBody>
+          <a:bodyPr rtlCol="0" anchor="ctr"/>
+          <a:lstStyle/>
+          <a:p>
+            <a:pPr algn="ctr"/>
+          </a:p>
+        </p:txBody>
+      </p:sp>
+      <p:sp>
+        <p:nvSpPr>
+          <p:cNvPr id="3" name="Rectangle 2"/>
+          <p:cNvSpPr/>
+          <p:nvPr/>
+        </p:nvSpPr>
+        <p:spPr>
+          <a:xfrm>
+            <a:off x="320040" y="0"/>
+            <a:ext cx="11871655" cy="36576"/>
+          </a:xfrm>
+          <a:prstGeom prst="rect">
+            <a:avLst/>
+          </a:prstGeom>
+          <a:solidFill>
+            <a:srgbClr val="C5A55A"/>
+          </a:solidFill>
+          <a:ln>
+            <a:noFill/>
+          </a:ln>
+        </p:spPr>
+        <p:style>
+          <a:lnRef idx="1">
+            <a:schemeClr val="accent1"/>
+          </a:lnRef>
+          <a:fillRef idx="3">
+            <a:schemeClr val="accent1"/>
+          </a:fillRef>
+          <a:effectRef idx="2">
+            <a:schemeClr val="accent1"/>
+          </a:effectRef>
+          <a:fontRef idx="minor">
+            <a:schemeClr val="lt1"/>
+          </a:fontRef>
+        </p:style>
+        <p:txBody>
+          <a:bodyPr rtlCol="0" anchor="ctr"/>
+          <a:lstStyle/>
+          <a:p>
+            <a:pPr algn="ctr"/>
+          </a:p>
+        </p:txBody>
+      </p:sp>
+      <p:sp>
+        <p:nvSpPr>
+          <p:cNvPr id="4" name="Rectangle 3"/>
+          <p:cNvSpPr/>
+          <p:nvPr/>
+        </p:nvSpPr>
+        <p:spPr>
+          <a:xfrm>
+            <a:off x="320040" y="36576"/>
+            <a:ext cx="11871655" cy="1005840"/>
+          </a:xfrm>
+          <a:prstGeom prst="rect">
+            <a:avLst/>
+          </a:prstGeom>
+          <a:solidFill>
+            <a:srgbClr val="F5F3EF"/>
+          </a:solidFill>
+          <a:ln>
+            <a:noFill/>
+          </a:ln>
+        </p:spPr>
+        <p:style>
+          <a:lnRef idx="1">
+            <a:schemeClr val="accent1"/>
+          </a:lnRef>
+          <a:fillRef idx="3">
+            <a:schemeClr val="accent1"/>
+          </a:fillRef>
+          <a:effectRef idx="2">
+            <a:schemeClr val="accent1"/>
+          </a:effectRef>
+          <a:fontRef idx="minor">
+            <a:schemeClr val="lt1"/>
+          </a:fontRef>
+        </p:style>
+        <p:txBody>
+          <a:bodyPr rtlCol="0" anchor="ctr"/>
+          <a:lstStyle/>
+          <a:p>
+            <a:pPr algn="ctr"/>
+          </a:p>
+        </p:txBody>
+      </p:sp>
+      <p:sp>
+        <p:nvSpPr>
+          <p:cNvPr id="5" name="TextBox 4"/>
           <p:cNvSpPr txBox="1"/>
           <p:nvPr/>
         </p:nvSpPr>
         <p:spPr>
           <a:xfrm>
-            <a:off x="457200" y="365760"/>
-            <a:ext cx="11247120" cy="822960"/>
+            <a:off x="822960" y="164592"/>
+            <a:ext cx="10515600" cy="731520"/>
           </a:xfrm>
           <a:prstGeom prst="rect">
             <a:avLst/>
@@ -3272,18 +4138,191 @@
           <a:noFill/>
         </p:spPr>
         <p:txBody>
-          <a:bodyPr wrap="none">
-            <a:spAutoFit/>
-          </a:bodyPr>
-          <a:lstStyle/>
-          <a:p>
-            <a:r>
-              <a:rPr sz="2400" b="1">
+          <a:bodyPr wrap="square"/>
+          <a:lstStyle/>
+          <a:p>
+            <a:pPr algn="l">
+              <a:spcBef>
+                <a:spcPts val="0"/>
+              </a:spcBef>
+              <a:spcAft>
+                <a:spcPts val="0"/>
+              </a:spcAft>
+            </a:pPr>
+            <a:r>
+              <a:rPr sz="2200" b="1">
                 <a:solidFill>
-                  <a:srgbClr val="0B3D91"/>
+                  <a:srgbClr val="1B2A4A"/>
                 </a:solidFill>
+                <a:latin typeface="Calibri"/>
               </a:rPr>
               <a:t>[12/15] Bear case</a:t>
+            </a:r>
+          </a:p>
+        </p:txBody>
+      </p:sp>
+      <p:sp>
+        <p:nvSpPr>
+          <p:cNvPr id="6" name="Rectangle 5"/>
+          <p:cNvSpPr/>
+          <p:nvPr/>
+        </p:nvSpPr>
+        <p:spPr>
+          <a:xfrm>
+            <a:off x="822960" y="1042415"/>
+            <a:ext cx="10058400" cy="18288"/>
+          </a:xfrm>
+          <a:prstGeom prst="rect">
+            <a:avLst/>
+          </a:prstGeom>
+          <a:solidFill>
+            <a:srgbClr val="6C757D"/>
+          </a:solidFill>
+          <a:ln>
+            <a:noFill/>
+          </a:ln>
+        </p:spPr>
+        <p:style>
+          <a:lnRef idx="1">
+            <a:schemeClr val="accent1"/>
+          </a:lnRef>
+          <a:fillRef idx="3">
+            <a:schemeClr val="accent1"/>
+          </a:fillRef>
+          <a:effectRef idx="2">
+            <a:schemeClr val="accent1"/>
+          </a:effectRef>
+          <a:fontRef idx="minor">
+            <a:schemeClr val="lt1"/>
+          </a:fontRef>
+        </p:style>
+        <p:txBody>
+          <a:bodyPr rtlCol="0" anchor="ctr"/>
+          <a:lstStyle/>
+          <a:p>
+            <a:pPr algn="ctr"/>
+          </a:p>
+        </p:txBody>
+      </p:sp>
+      <p:sp>
+        <p:nvSpPr>
+          <p:cNvPr id="7" name="Rectangle 6"/>
+          <p:cNvSpPr/>
+          <p:nvPr/>
+        </p:nvSpPr>
+        <p:spPr>
+          <a:xfrm>
+            <a:off x="822960" y="6446520"/>
+            <a:ext cx="10515600" cy="9144"/>
+          </a:xfrm>
+          <a:prstGeom prst="rect">
+            <a:avLst/>
+          </a:prstGeom>
+          <a:solidFill>
+            <a:srgbClr val="6C757D"/>
+          </a:solidFill>
+          <a:ln>
+            <a:noFill/>
+          </a:ln>
+        </p:spPr>
+        <p:style>
+          <a:lnRef idx="1">
+            <a:schemeClr val="accent1"/>
+          </a:lnRef>
+          <a:fillRef idx="3">
+            <a:schemeClr val="accent1"/>
+          </a:fillRef>
+          <a:effectRef idx="2">
+            <a:schemeClr val="accent1"/>
+          </a:effectRef>
+          <a:fontRef idx="minor">
+            <a:schemeClr val="lt1"/>
+          </a:fontRef>
+        </p:style>
+        <p:txBody>
+          <a:bodyPr rtlCol="0" anchor="ctr"/>
+          <a:lstStyle/>
+          <a:p>
+            <a:pPr algn="ctr"/>
+          </a:p>
+        </p:txBody>
+      </p:sp>
+      <p:sp>
+        <p:nvSpPr>
+          <p:cNvPr id="8" name="TextBox 7"/>
+          <p:cNvSpPr txBox="1"/>
+          <p:nvPr/>
+        </p:nvSpPr>
+        <p:spPr>
+          <a:xfrm>
+            <a:off x="11155680" y="6492240"/>
+            <a:ext cx="731520" cy="274320"/>
+          </a:xfrm>
+          <a:prstGeom prst="rect">
+            <a:avLst/>
+          </a:prstGeom>
+          <a:noFill/>
+        </p:spPr>
+        <p:txBody>
+          <a:bodyPr wrap="square"/>
+          <a:lstStyle/>
+          <a:p>
+            <a:pPr algn="r">
+              <a:spcBef>
+                <a:spcPts val="0"/>
+              </a:spcBef>
+              <a:spcAft>
+                <a:spcPts val="0"/>
+              </a:spcAft>
+            </a:pPr>
+            <a:r>
+              <a:rPr sz="900" b="0">
+                <a:solidFill>
+                  <a:srgbClr val="6C757D"/>
+                </a:solidFill>
+                <a:latin typeface="Calibri"/>
+              </a:rPr>
+              <a:t>12/15</a:t>
+            </a:r>
+          </a:p>
+        </p:txBody>
+      </p:sp>
+      <p:sp>
+        <p:nvSpPr>
+          <p:cNvPr id="9" name="TextBox 8"/>
+          <p:cNvSpPr txBox="1"/>
+          <p:nvPr/>
+        </p:nvSpPr>
+        <p:spPr>
+          <a:xfrm>
+            <a:off x="822960" y="6492240"/>
+            <a:ext cx="2743200" cy="274320"/>
+          </a:xfrm>
+          <a:prstGeom prst="rect">
+            <a:avLst/>
+          </a:prstGeom>
+          <a:noFill/>
+        </p:spPr>
+        <p:txBody>
+          <a:bodyPr wrap="square"/>
+          <a:lstStyle/>
+          <a:p>
+            <a:pPr algn="l">
+              <a:spcBef>
+                <a:spcPts val="0"/>
+              </a:spcBef>
+              <a:spcAft>
+                <a:spcPts val="0"/>
+              </a:spcAft>
+            </a:pPr>
+            <a:r>
+              <a:rPr sz="800" b="0">
+                <a:solidFill>
+                  <a:srgbClr val="6C757D"/>
+                </a:solidFill>
+                <a:latin typeface="Calibri"/>
+              </a:rPr>
+              <a:t>CONFIDENTIEL</a:t>
             </a:r>
           </a:p>
         </p:txBody>
@@ -3308,14 +4347,143 @@
       <p:grpSpPr/>
       <p:sp>
         <p:nvSpPr>
-          <p:cNvPr id="2" name="TextBox 1"/>
+          <p:cNvPr id="2" name="Rectangle 1"/>
+          <p:cNvSpPr/>
+          <p:nvPr/>
+        </p:nvSpPr>
+        <p:spPr>
+          <a:xfrm>
+            <a:off x="0" y="0"/>
+            <a:ext cx="320040" cy="6858000"/>
+          </a:xfrm>
+          <a:prstGeom prst="rect">
+            <a:avLst/>
+          </a:prstGeom>
+          <a:solidFill>
+            <a:srgbClr val="1B2A4A"/>
+          </a:solidFill>
+          <a:ln>
+            <a:noFill/>
+          </a:ln>
+        </p:spPr>
+        <p:style>
+          <a:lnRef idx="1">
+            <a:schemeClr val="accent1"/>
+          </a:lnRef>
+          <a:fillRef idx="3">
+            <a:schemeClr val="accent1"/>
+          </a:fillRef>
+          <a:effectRef idx="2">
+            <a:schemeClr val="accent1"/>
+          </a:effectRef>
+          <a:fontRef idx="minor">
+            <a:schemeClr val="lt1"/>
+          </a:fontRef>
+        </p:style>
+        <p:txBody>
+          <a:bodyPr rtlCol="0" anchor="ctr"/>
+          <a:lstStyle/>
+          <a:p>
+            <a:pPr algn="ctr"/>
+          </a:p>
+        </p:txBody>
+      </p:sp>
+      <p:sp>
+        <p:nvSpPr>
+          <p:cNvPr id="3" name="Rectangle 2"/>
+          <p:cNvSpPr/>
+          <p:nvPr/>
+        </p:nvSpPr>
+        <p:spPr>
+          <a:xfrm>
+            <a:off x="320040" y="0"/>
+            <a:ext cx="11871655" cy="36576"/>
+          </a:xfrm>
+          <a:prstGeom prst="rect">
+            <a:avLst/>
+          </a:prstGeom>
+          <a:solidFill>
+            <a:srgbClr val="C5A55A"/>
+          </a:solidFill>
+          <a:ln>
+            <a:noFill/>
+          </a:ln>
+        </p:spPr>
+        <p:style>
+          <a:lnRef idx="1">
+            <a:schemeClr val="accent1"/>
+          </a:lnRef>
+          <a:fillRef idx="3">
+            <a:schemeClr val="accent1"/>
+          </a:fillRef>
+          <a:effectRef idx="2">
+            <a:schemeClr val="accent1"/>
+          </a:effectRef>
+          <a:fontRef idx="minor">
+            <a:schemeClr val="lt1"/>
+          </a:fontRef>
+        </p:style>
+        <p:txBody>
+          <a:bodyPr rtlCol="0" anchor="ctr"/>
+          <a:lstStyle/>
+          <a:p>
+            <a:pPr algn="ctr"/>
+          </a:p>
+        </p:txBody>
+      </p:sp>
+      <p:sp>
+        <p:nvSpPr>
+          <p:cNvPr id="4" name="Rectangle 3"/>
+          <p:cNvSpPr/>
+          <p:nvPr/>
+        </p:nvSpPr>
+        <p:spPr>
+          <a:xfrm>
+            <a:off x="320040" y="36576"/>
+            <a:ext cx="11871655" cy="1005840"/>
+          </a:xfrm>
+          <a:prstGeom prst="rect">
+            <a:avLst/>
+          </a:prstGeom>
+          <a:solidFill>
+            <a:srgbClr val="F5F3EF"/>
+          </a:solidFill>
+          <a:ln>
+            <a:noFill/>
+          </a:ln>
+        </p:spPr>
+        <p:style>
+          <a:lnRef idx="1">
+            <a:schemeClr val="accent1"/>
+          </a:lnRef>
+          <a:fillRef idx="3">
+            <a:schemeClr val="accent1"/>
+          </a:fillRef>
+          <a:effectRef idx="2">
+            <a:schemeClr val="accent1"/>
+          </a:effectRef>
+          <a:fontRef idx="minor">
+            <a:schemeClr val="lt1"/>
+          </a:fontRef>
+        </p:style>
+        <p:txBody>
+          <a:bodyPr rtlCol="0" anchor="ctr"/>
+          <a:lstStyle/>
+          <a:p>
+            <a:pPr algn="ctr"/>
+          </a:p>
+        </p:txBody>
+      </p:sp>
+      <p:sp>
+        <p:nvSpPr>
+          <p:cNvPr id="5" name="TextBox 4"/>
           <p:cNvSpPr txBox="1"/>
           <p:nvPr/>
         </p:nvSpPr>
         <p:spPr>
           <a:xfrm>
-            <a:off x="457200" y="365760"/>
-            <a:ext cx="11247120" cy="822960"/>
+            <a:off x="822960" y="164592"/>
+            <a:ext cx="10515600" cy="731520"/>
           </a:xfrm>
           <a:prstGeom prst="rect">
             <a:avLst/>
@@ -3323,18 +4491,191 @@
           <a:noFill/>
         </p:spPr>
         <p:txBody>
-          <a:bodyPr wrap="none">
-            <a:spAutoFit/>
-          </a:bodyPr>
-          <a:lstStyle/>
-          <a:p>
-            <a:r>
-              <a:rPr sz="2400" b="1">
+          <a:bodyPr wrap="square"/>
+          <a:lstStyle/>
+          <a:p>
+            <a:pPr algn="l">
+              <a:spcBef>
+                <a:spcPts val="0"/>
+              </a:spcBef>
+              <a:spcAft>
+                <a:spcPts val="0"/>
+              </a:spcAft>
+            </a:pPr>
+            <a:r>
+              <a:rPr sz="2200" b="1">
                 <a:solidFill>
-                  <a:srgbClr val="0B3D91"/>
+                  <a:srgbClr val="1B2A4A"/>
                 </a:solidFill>
+                <a:latin typeface="Calibri"/>
               </a:rPr>
               <a:t>[13/15] Recommandation</a:t>
+            </a:r>
+          </a:p>
+        </p:txBody>
+      </p:sp>
+      <p:sp>
+        <p:nvSpPr>
+          <p:cNvPr id="6" name="Rectangle 5"/>
+          <p:cNvSpPr/>
+          <p:nvPr/>
+        </p:nvSpPr>
+        <p:spPr>
+          <a:xfrm>
+            <a:off x="822960" y="1042415"/>
+            <a:ext cx="10058400" cy="18288"/>
+          </a:xfrm>
+          <a:prstGeom prst="rect">
+            <a:avLst/>
+          </a:prstGeom>
+          <a:solidFill>
+            <a:srgbClr val="6C757D"/>
+          </a:solidFill>
+          <a:ln>
+            <a:noFill/>
+          </a:ln>
+        </p:spPr>
+        <p:style>
+          <a:lnRef idx="1">
+            <a:schemeClr val="accent1"/>
+          </a:lnRef>
+          <a:fillRef idx="3">
+            <a:schemeClr val="accent1"/>
+          </a:fillRef>
+          <a:effectRef idx="2">
+            <a:schemeClr val="accent1"/>
+          </a:effectRef>
+          <a:fontRef idx="minor">
+            <a:schemeClr val="lt1"/>
+          </a:fontRef>
+        </p:style>
+        <p:txBody>
+          <a:bodyPr rtlCol="0" anchor="ctr"/>
+          <a:lstStyle/>
+          <a:p>
+            <a:pPr algn="ctr"/>
+          </a:p>
+        </p:txBody>
+      </p:sp>
+      <p:sp>
+        <p:nvSpPr>
+          <p:cNvPr id="7" name="Rectangle 6"/>
+          <p:cNvSpPr/>
+          <p:nvPr/>
+        </p:nvSpPr>
+        <p:spPr>
+          <a:xfrm>
+            <a:off x="822960" y="6446520"/>
+            <a:ext cx="10515600" cy="9144"/>
+          </a:xfrm>
+          <a:prstGeom prst="rect">
+            <a:avLst/>
+          </a:prstGeom>
+          <a:solidFill>
+            <a:srgbClr val="6C757D"/>
+          </a:solidFill>
+          <a:ln>
+            <a:noFill/>
+          </a:ln>
+        </p:spPr>
+        <p:style>
+          <a:lnRef idx="1">
+            <a:schemeClr val="accent1"/>
+          </a:lnRef>
+          <a:fillRef idx="3">
+            <a:schemeClr val="accent1"/>
+          </a:fillRef>
+          <a:effectRef idx="2">
+            <a:schemeClr val="accent1"/>
+          </a:effectRef>
+          <a:fontRef idx="minor">
+            <a:schemeClr val="lt1"/>
+          </a:fontRef>
+        </p:style>
+        <p:txBody>
+          <a:bodyPr rtlCol="0" anchor="ctr"/>
+          <a:lstStyle/>
+          <a:p>
+            <a:pPr algn="ctr"/>
+          </a:p>
+        </p:txBody>
+      </p:sp>
+      <p:sp>
+        <p:nvSpPr>
+          <p:cNvPr id="8" name="TextBox 7"/>
+          <p:cNvSpPr txBox="1"/>
+          <p:nvPr/>
+        </p:nvSpPr>
+        <p:spPr>
+          <a:xfrm>
+            <a:off x="11155680" y="6492240"/>
+            <a:ext cx="731520" cy="274320"/>
+          </a:xfrm>
+          <a:prstGeom prst="rect">
+            <a:avLst/>
+          </a:prstGeom>
+          <a:noFill/>
+        </p:spPr>
+        <p:txBody>
+          <a:bodyPr wrap="square"/>
+          <a:lstStyle/>
+          <a:p>
+            <a:pPr algn="r">
+              <a:spcBef>
+                <a:spcPts val="0"/>
+              </a:spcBef>
+              <a:spcAft>
+                <a:spcPts val="0"/>
+              </a:spcAft>
+            </a:pPr>
+            <a:r>
+              <a:rPr sz="900" b="0">
+                <a:solidFill>
+                  <a:srgbClr val="6C757D"/>
+                </a:solidFill>
+                <a:latin typeface="Calibri"/>
+              </a:rPr>
+              <a:t>13/15</a:t>
+            </a:r>
+          </a:p>
+        </p:txBody>
+      </p:sp>
+      <p:sp>
+        <p:nvSpPr>
+          <p:cNvPr id="9" name="TextBox 8"/>
+          <p:cNvSpPr txBox="1"/>
+          <p:nvPr/>
+        </p:nvSpPr>
+        <p:spPr>
+          <a:xfrm>
+            <a:off x="822960" y="6492240"/>
+            <a:ext cx="2743200" cy="274320"/>
+          </a:xfrm>
+          <a:prstGeom prst="rect">
+            <a:avLst/>
+          </a:prstGeom>
+          <a:noFill/>
+        </p:spPr>
+        <p:txBody>
+          <a:bodyPr wrap="square"/>
+          <a:lstStyle/>
+          <a:p>
+            <a:pPr algn="l">
+              <a:spcBef>
+                <a:spcPts val="0"/>
+              </a:spcBef>
+              <a:spcAft>
+                <a:spcPts val="0"/>
+              </a:spcAft>
+            </a:pPr>
+            <a:r>
+              <a:rPr sz="800" b="0">
+                <a:solidFill>
+                  <a:srgbClr val="6C757D"/>
+                </a:solidFill>
+                <a:latin typeface="Calibri"/>
+              </a:rPr>
+              <a:t>CONFIDENTIEL</a:t>
             </a:r>
           </a:p>
         </p:txBody>
@@ -3359,14 +4700,143 @@
       <p:grpSpPr/>
       <p:sp>
         <p:nvSpPr>
-          <p:cNvPr id="2" name="TextBox 1"/>
+          <p:cNvPr id="2" name="Rectangle 1"/>
+          <p:cNvSpPr/>
+          <p:nvPr/>
+        </p:nvSpPr>
+        <p:spPr>
+          <a:xfrm>
+            <a:off x="0" y="0"/>
+            <a:ext cx="320040" cy="6858000"/>
+          </a:xfrm>
+          <a:prstGeom prst="rect">
+            <a:avLst/>
+          </a:prstGeom>
+          <a:solidFill>
+            <a:srgbClr val="1B2A4A"/>
+          </a:solidFill>
+          <a:ln>
+            <a:noFill/>
+          </a:ln>
+        </p:spPr>
+        <p:style>
+          <a:lnRef idx="1">
+            <a:schemeClr val="accent1"/>
+          </a:lnRef>
+          <a:fillRef idx="3">
+            <a:schemeClr val="accent1"/>
+          </a:fillRef>
+          <a:effectRef idx="2">
+            <a:schemeClr val="accent1"/>
+          </a:effectRef>
+          <a:fontRef idx="minor">
+            <a:schemeClr val="lt1"/>
+          </a:fontRef>
+        </p:style>
+        <p:txBody>
+          <a:bodyPr rtlCol="0" anchor="ctr"/>
+          <a:lstStyle/>
+          <a:p>
+            <a:pPr algn="ctr"/>
+          </a:p>
+        </p:txBody>
+      </p:sp>
+      <p:sp>
+        <p:nvSpPr>
+          <p:cNvPr id="3" name="Rectangle 2"/>
+          <p:cNvSpPr/>
+          <p:nvPr/>
+        </p:nvSpPr>
+        <p:spPr>
+          <a:xfrm>
+            <a:off x="320040" y="0"/>
+            <a:ext cx="11871655" cy="36576"/>
+          </a:xfrm>
+          <a:prstGeom prst="rect">
+            <a:avLst/>
+          </a:prstGeom>
+          <a:solidFill>
+            <a:srgbClr val="C5A55A"/>
+          </a:solidFill>
+          <a:ln>
+            <a:noFill/>
+          </a:ln>
+        </p:spPr>
+        <p:style>
+          <a:lnRef idx="1">
+            <a:schemeClr val="accent1"/>
+          </a:lnRef>
+          <a:fillRef idx="3">
+            <a:schemeClr val="accent1"/>
+          </a:fillRef>
+          <a:effectRef idx="2">
+            <a:schemeClr val="accent1"/>
+          </a:effectRef>
+          <a:fontRef idx="minor">
+            <a:schemeClr val="lt1"/>
+          </a:fontRef>
+        </p:style>
+        <p:txBody>
+          <a:bodyPr rtlCol="0" anchor="ctr"/>
+          <a:lstStyle/>
+          <a:p>
+            <a:pPr algn="ctr"/>
+          </a:p>
+        </p:txBody>
+      </p:sp>
+      <p:sp>
+        <p:nvSpPr>
+          <p:cNvPr id="4" name="Rectangle 3"/>
+          <p:cNvSpPr/>
+          <p:nvPr/>
+        </p:nvSpPr>
+        <p:spPr>
+          <a:xfrm>
+            <a:off x="320040" y="36576"/>
+            <a:ext cx="11871655" cy="1005840"/>
+          </a:xfrm>
+          <a:prstGeom prst="rect">
+            <a:avLst/>
+          </a:prstGeom>
+          <a:solidFill>
+            <a:srgbClr val="F5F3EF"/>
+          </a:solidFill>
+          <a:ln>
+            <a:noFill/>
+          </a:ln>
+        </p:spPr>
+        <p:style>
+          <a:lnRef idx="1">
+            <a:schemeClr val="accent1"/>
+          </a:lnRef>
+          <a:fillRef idx="3">
+            <a:schemeClr val="accent1"/>
+          </a:fillRef>
+          <a:effectRef idx="2">
+            <a:schemeClr val="accent1"/>
+          </a:effectRef>
+          <a:fontRef idx="minor">
+            <a:schemeClr val="lt1"/>
+          </a:fontRef>
+        </p:style>
+        <p:txBody>
+          <a:bodyPr rtlCol="0" anchor="ctr"/>
+          <a:lstStyle/>
+          <a:p>
+            <a:pPr algn="ctr"/>
+          </a:p>
+        </p:txBody>
+      </p:sp>
+      <p:sp>
+        <p:nvSpPr>
+          <p:cNvPr id="5" name="TextBox 4"/>
           <p:cNvSpPr txBox="1"/>
           <p:nvPr/>
         </p:nvSpPr>
         <p:spPr>
           <a:xfrm>
-            <a:off x="457200" y="365760"/>
-            <a:ext cx="11247120" cy="822960"/>
+            <a:off x="822960" y="164592"/>
+            <a:ext cx="10515600" cy="731520"/>
           </a:xfrm>
           <a:prstGeom prst="rect">
             <a:avLst/>
@@ -3374,18 +4844,191 @@
           <a:noFill/>
         </p:spPr>
         <p:txBody>
-          <a:bodyPr wrap="none">
-            <a:spAutoFit/>
-          </a:bodyPr>
-          <a:lstStyle/>
-          <a:p>
-            <a:r>
-              <a:rPr sz="2400" b="1">
+          <a:bodyPr wrap="square"/>
+          <a:lstStyle/>
+          <a:p>
+            <a:pPr algn="l">
+              <a:spcBef>
+                <a:spcPts val="0"/>
+              </a:spcBef>
+              <a:spcAft>
+                <a:spcPts val="0"/>
+              </a:spcAft>
+            </a:pPr>
+            <a:r>
+              <a:rPr sz="2200" b="1">
                 <a:solidFill>
-                  <a:srgbClr val="0B3D91"/>
+                  <a:srgbClr val="1B2A4A"/>
                 </a:solidFill>
+                <a:latin typeface="Calibri"/>
               </a:rPr>
               <a:t>[14/15] Target price</a:t>
+            </a:r>
+          </a:p>
+        </p:txBody>
+      </p:sp>
+      <p:sp>
+        <p:nvSpPr>
+          <p:cNvPr id="6" name="Rectangle 5"/>
+          <p:cNvSpPr/>
+          <p:nvPr/>
+        </p:nvSpPr>
+        <p:spPr>
+          <a:xfrm>
+            <a:off x="822960" y="1042415"/>
+            <a:ext cx="10058400" cy="18288"/>
+          </a:xfrm>
+          <a:prstGeom prst="rect">
+            <a:avLst/>
+          </a:prstGeom>
+          <a:solidFill>
+            <a:srgbClr val="6C757D"/>
+          </a:solidFill>
+          <a:ln>
+            <a:noFill/>
+          </a:ln>
+        </p:spPr>
+        <p:style>
+          <a:lnRef idx="1">
+            <a:schemeClr val="accent1"/>
+          </a:lnRef>
+          <a:fillRef idx="3">
+            <a:schemeClr val="accent1"/>
+          </a:fillRef>
+          <a:effectRef idx="2">
+            <a:schemeClr val="accent1"/>
+          </a:effectRef>
+          <a:fontRef idx="minor">
+            <a:schemeClr val="lt1"/>
+          </a:fontRef>
+        </p:style>
+        <p:txBody>
+          <a:bodyPr rtlCol="0" anchor="ctr"/>
+          <a:lstStyle/>
+          <a:p>
+            <a:pPr algn="ctr"/>
+          </a:p>
+        </p:txBody>
+      </p:sp>
+      <p:sp>
+        <p:nvSpPr>
+          <p:cNvPr id="7" name="Rectangle 6"/>
+          <p:cNvSpPr/>
+          <p:nvPr/>
+        </p:nvSpPr>
+        <p:spPr>
+          <a:xfrm>
+            <a:off x="822960" y="6446520"/>
+            <a:ext cx="10515600" cy="9144"/>
+          </a:xfrm>
+          <a:prstGeom prst="rect">
+            <a:avLst/>
+          </a:prstGeom>
+          <a:solidFill>
+            <a:srgbClr val="6C757D"/>
+          </a:solidFill>
+          <a:ln>
+            <a:noFill/>
+          </a:ln>
+        </p:spPr>
+        <p:style>
+          <a:lnRef idx="1">
+            <a:schemeClr val="accent1"/>
+          </a:lnRef>
+          <a:fillRef idx="3">
+            <a:schemeClr val="accent1"/>
+          </a:fillRef>
+          <a:effectRef idx="2">
+            <a:schemeClr val="accent1"/>
+          </a:effectRef>
+          <a:fontRef idx="minor">
+            <a:schemeClr val="lt1"/>
+          </a:fontRef>
+        </p:style>
+        <p:txBody>
+          <a:bodyPr rtlCol="0" anchor="ctr"/>
+          <a:lstStyle/>
+          <a:p>
+            <a:pPr algn="ctr"/>
+          </a:p>
+        </p:txBody>
+      </p:sp>
+      <p:sp>
+        <p:nvSpPr>
+          <p:cNvPr id="8" name="TextBox 7"/>
+          <p:cNvSpPr txBox="1"/>
+          <p:nvPr/>
+        </p:nvSpPr>
+        <p:spPr>
+          <a:xfrm>
+            <a:off x="11155680" y="6492240"/>
+            <a:ext cx="731520" cy="274320"/>
+          </a:xfrm>
+          <a:prstGeom prst="rect">
+            <a:avLst/>
+          </a:prstGeom>
+          <a:noFill/>
+        </p:spPr>
+        <p:txBody>
+          <a:bodyPr wrap="square"/>
+          <a:lstStyle/>
+          <a:p>
+            <a:pPr algn="r">
+              <a:spcBef>
+                <a:spcPts val="0"/>
+              </a:spcBef>
+              <a:spcAft>
+                <a:spcPts val="0"/>
+              </a:spcAft>
+            </a:pPr>
+            <a:r>
+              <a:rPr sz="900" b="0">
+                <a:solidFill>
+                  <a:srgbClr val="6C757D"/>
+                </a:solidFill>
+                <a:latin typeface="Calibri"/>
+              </a:rPr>
+              <a:t>14/15</a:t>
+            </a:r>
+          </a:p>
+        </p:txBody>
+      </p:sp>
+      <p:sp>
+        <p:nvSpPr>
+          <p:cNvPr id="9" name="TextBox 8"/>
+          <p:cNvSpPr txBox="1"/>
+          <p:nvPr/>
+        </p:nvSpPr>
+        <p:spPr>
+          <a:xfrm>
+            <a:off x="822960" y="6492240"/>
+            <a:ext cx="2743200" cy="274320"/>
+          </a:xfrm>
+          <a:prstGeom prst="rect">
+            <a:avLst/>
+          </a:prstGeom>
+          <a:noFill/>
+        </p:spPr>
+        <p:txBody>
+          <a:bodyPr wrap="square"/>
+          <a:lstStyle/>
+          <a:p>
+            <a:pPr algn="l">
+              <a:spcBef>
+                <a:spcPts val="0"/>
+              </a:spcBef>
+              <a:spcAft>
+                <a:spcPts val="0"/>
+              </a:spcAft>
+            </a:pPr>
+            <a:r>
+              <a:rPr sz="800" b="0">
+                <a:solidFill>
+                  <a:srgbClr val="6C757D"/>
+                </a:solidFill>
+                <a:latin typeface="Calibri"/>
+              </a:rPr>
+              <a:t>CONFIDENTIEL</a:t>
             </a:r>
           </a:p>
         </p:txBody>
@@ -3410,14 +5053,143 @@
       <p:grpSpPr/>
       <p:sp>
         <p:nvSpPr>
-          <p:cNvPr id="2" name="TextBox 1"/>
+          <p:cNvPr id="2" name="Rectangle 1"/>
+          <p:cNvSpPr/>
+          <p:nvPr/>
+        </p:nvSpPr>
+        <p:spPr>
+          <a:xfrm>
+            <a:off x="0" y="0"/>
+            <a:ext cx="320040" cy="6858000"/>
+          </a:xfrm>
+          <a:prstGeom prst="rect">
+            <a:avLst/>
+          </a:prstGeom>
+          <a:solidFill>
+            <a:srgbClr val="1B2A4A"/>
+          </a:solidFill>
+          <a:ln>
+            <a:noFill/>
+          </a:ln>
+        </p:spPr>
+        <p:style>
+          <a:lnRef idx="1">
+            <a:schemeClr val="accent1"/>
+          </a:lnRef>
+          <a:fillRef idx="3">
+            <a:schemeClr val="accent1"/>
+          </a:fillRef>
+          <a:effectRef idx="2">
+            <a:schemeClr val="accent1"/>
+          </a:effectRef>
+          <a:fontRef idx="minor">
+            <a:schemeClr val="lt1"/>
+          </a:fontRef>
+        </p:style>
+        <p:txBody>
+          <a:bodyPr rtlCol="0" anchor="ctr"/>
+          <a:lstStyle/>
+          <a:p>
+            <a:pPr algn="ctr"/>
+          </a:p>
+        </p:txBody>
+      </p:sp>
+      <p:sp>
+        <p:nvSpPr>
+          <p:cNvPr id="3" name="Rectangle 2"/>
+          <p:cNvSpPr/>
+          <p:nvPr/>
+        </p:nvSpPr>
+        <p:spPr>
+          <a:xfrm>
+            <a:off x="320040" y="0"/>
+            <a:ext cx="11871655" cy="36576"/>
+          </a:xfrm>
+          <a:prstGeom prst="rect">
+            <a:avLst/>
+          </a:prstGeom>
+          <a:solidFill>
+            <a:srgbClr val="C5A55A"/>
+          </a:solidFill>
+          <a:ln>
+            <a:noFill/>
+          </a:ln>
+        </p:spPr>
+        <p:style>
+          <a:lnRef idx="1">
+            <a:schemeClr val="accent1"/>
+          </a:lnRef>
+          <a:fillRef idx="3">
+            <a:schemeClr val="accent1"/>
+          </a:fillRef>
+          <a:effectRef idx="2">
+            <a:schemeClr val="accent1"/>
+          </a:effectRef>
+          <a:fontRef idx="minor">
+            <a:schemeClr val="lt1"/>
+          </a:fontRef>
+        </p:style>
+        <p:txBody>
+          <a:bodyPr rtlCol="0" anchor="ctr"/>
+          <a:lstStyle/>
+          <a:p>
+            <a:pPr algn="ctr"/>
+          </a:p>
+        </p:txBody>
+      </p:sp>
+      <p:sp>
+        <p:nvSpPr>
+          <p:cNvPr id="4" name="Rectangle 3"/>
+          <p:cNvSpPr/>
+          <p:nvPr/>
+        </p:nvSpPr>
+        <p:spPr>
+          <a:xfrm>
+            <a:off x="320040" y="36576"/>
+            <a:ext cx="11871655" cy="1005840"/>
+          </a:xfrm>
+          <a:prstGeom prst="rect">
+            <a:avLst/>
+          </a:prstGeom>
+          <a:solidFill>
+            <a:srgbClr val="F5F3EF"/>
+          </a:solidFill>
+          <a:ln>
+            <a:noFill/>
+          </a:ln>
+        </p:spPr>
+        <p:style>
+          <a:lnRef idx="1">
+            <a:schemeClr val="accent1"/>
+          </a:lnRef>
+          <a:fillRef idx="3">
+            <a:schemeClr val="accent1"/>
+          </a:fillRef>
+          <a:effectRef idx="2">
+            <a:schemeClr val="accent1"/>
+          </a:effectRef>
+          <a:fontRef idx="minor">
+            <a:schemeClr val="lt1"/>
+          </a:fontRef>
+        </p:style>
+        <p:txBody>
+          <a:bodyPr rtlCol="0" anchor="ctr"/>
+          <a:lstStyle/>
+          <a:p>
+            <a:pPr algn="ctr"/>
+          </a:p>
+        </p:txBody>
+      </p:sp>
+      <p:sp>
+        <p:nvSpPr>
+          <p:cNvPr id="5" name="TextBox 4"/>
           <p:cNvSpPr txBox="1"/>
           <p:nvPr/>
         </p:nvSpPr>
         <p:spPr>
           <a:xfrm>
-            <a:off x="457200" y="365760"/>
-            <a:ext cx="11247120" cy="822960"/>
+            <a:off x="822960" y="164592"/>
+            <a:ext cx="10515600" cy="731520"/>
           </a:xfrm>
           <a:prstGeom prst="rect">
             <a:avLst/>
@@ -3425,18 +5197,191 @@
           <a:noFill/>
         </p:spPr>
         <p:txBody>
-          <a:bodyPr wrap="none">
-            <a:spAutoFit/>
-          </a:bodyPr>
-          <a:lstStyle/>
-          <a:p>
-            <a:r>
-              <a:rPr sz="2400" b="1">
+          <a:bodyPr wrap="square"/>
+          <a:lstStyle/>
+          <a:p>
+            <a:pPr algn="l">
+              <a:spcBef>
+                <a:spcPts val="0"/>
+              </a:spcBef>
+              <a:spcAft>
+                <a:spcPts val="0"/>
+              </a:spcAft>
+            </a:pPr>
+            <a:r>
+              <a:rPr sz="2200" b="1">
                 <a:solidFill>
-                  <a:srgbClr val="0B3D91"/>
+                  <a:srgbClr val="1B2A4A"/>
                 </a:solidFill>
+                <a:latin typeface="Calibri"/>
               </a:rPr>
               <a:t>[15/15] Sources</a:t>
+            </a:r>
+          </a:p>
+        </p:txBody>
+      </p:sp>
+      <p:sp>
+        <p:nvSpPr>
+          <p:cNvPr id="6" name="Rectangle 5"/>
+          <p:cNvSpPr/>
+          <p:nvPr/>
+        </p:nvSpPr>
+        <p:spPr>
+          <a:xfrm>
+            <a:off x="822960" y="1042415"/>
+            <a:ext cx="10058400" cy="18288"/>
+          </a:xfrm>
+          <a:prstGeom prst="rect">
+            <a:avLst/>
+          </a:prstGeom>
+          <a:solidFill>
+            <a:srgbClr val="6C757D"/>
+          </a:solidFill>
+          <a:ln>
+            <a:noFill/>
+          </a:ln>
+        </p:spPr>
+        <p:style>
+          <a:lnRef idx="1">
+            <a:schemeClr val="accent1"/>
+          </a:lnRef>
+          <a:fillRef idx="3">
+            <a:schemeClr val="accent1"/>
+          </a:fillRef>
+          <a:effectRef idx="2">
+            <a:schemeClr val="accent1"/>
+          </a:effectRef>
+          <a:fontRef idx="minor">
+            <a:schemeClr val="lt1"/>
+          </a:fontRef>
+        </p:style>
+        <p:txBody>
+          <a:bodyPr rtlCol="0" anchor="ctr"/>
+          <a:lstStyle/>
+          <a:p>
+            <a:pPr algn="ctr"/>
+          </a:p>
+        </p:txBody>
+      </p:sp>
+      <p:sp>
+        <p:nvSpPr>
+          <p:cNvPr id="7" name="Rectangle 6"/>
+          <p:cNvSpPr/>
+          <p:nvPr/>
+        </p:nvSpPr>
+        <p:spPr>
+          <a:xfrm>
+            <a:off x="822960" y="6446520"/>
+            <a:ext cx="10515600" cy="9144"/>
+          </a:xfrm>
+          <a:prstGeom prst="rect">
+            <a:avLst/>
+          </a:prstGeom>
+          <a:solidFill>
+            <a:srgbClr val="6C757D"/>
+          </a:solidFill>
+          <a:ln>
+            <a:noFill/>
+          </a:ln>
+        </p:spPr>
+        <p:style>
+          <a:lnRef idx="1">
+            <a:schemeClr val="accent1"/>
+          </a:lnRef>
+          <a:fillRef idx="3">
+            <a:schemeClr val="accent1"/>
+          </a:fillRef>
+          <a:effectRef idx="2">
+            <a:schemeClr val="accent1"/>
+          </a:effectRef>
+          <a:fontRef idx="minor">
+            <a:schemeClr val="lt1"/>
+          </a:fontRef>
+        </p:style>
+        <p:txBody>
+          <a:bodyPr rtlCol="0" anchor="ctr"/>
+          <a:lstStyle/>
+          <a:p>
+            <a:pPr algn="ctr"/>
+          </a:p>
+        </p:txBody>
+      </p:sp>
+      <p:sp>
+        <p:nvSpPr>
+          <p:cNvPr id="8" name="TextBox 7"/>
+          <p:cNvSpPr txBox="1"/>
+          <p:nvPr/>
+        </p:nvSpPr>
+        <p:spPr>
+          <a:xfrm>
+            <a:off x="11155680" y="6492240"/>
+            <a:ext cx="731520" cy="274320"/>
+          </a:xfrm>
+          <a:prstGeom prst="rect">
+            <a:avLst/>
+          </a:prstGeom>
+          <a:noFill/>
+        </p:spPr>
+        <p:txBody>
+          <a:bodyPr wrap="square"/>
+          <a:lstStyle/>
+          <a:p>
+            <a:pPr algn="r">
+              <a:spcBef>
+                <a:spcPts val="0"/>
+              </a:spcBef>
+              <a:spcAft>
+                <a:spcPts val="0"/>
+              </a:spcAft>
+            </a:pPr>
+            <a:r>
+              <a:rPr sz="900" b="0">
+                <a:solidFill>
+                  <a:srgbClr val="6C757D"/>
+                </a:solidFill>
+                <a:latin typeface="Calibri"/>
+              </a:rPr>
+              <a:t>15/15</a:t>
+            </a:r>
+          </a:p>
+        </p:txBody>
+      </p:sp>
+      <p:sp>
+        <p:nvSpPr>
+          <p:cNvPr id="9" name="TextBox 8"/>
+          <p:cNvSpPr txBox="1"/>
+          <p:nvPr/>
+        </p:nvSpPr>
+        <p:spPr>
+          <a:xfrm>
+            <a:off x="822960" y="6492240"/>
+            <a:ext cx="2743200" cy="274320"/>
+          </a:xfrm>
+          <a:prstGeom prst="rect">
+            <a:avLst/>
+          </a:prstGeom>
+          <a:noFill/>
+        </p:spPr>
+        <p:txBody>
+          <a:bodyPr wrap="square"/>
+          <a:lstStyle/>
+          <a:p>
+            <a:pPr algn="l">
+              <a:spcBef>
+                <a:spcPts val="0"/>
+              </a:spcBef>
+              <a:spcAft>
+                <a:spcPts val="0"/>
+              </a:spcAft>
+            </a:pPr>
+            <a:r>
+              <a:rPr sz="800" b="0">
+                <a:solidFill>
+                  <a:srgbClr val="6C757D"/>
+                </a:solidFill>
+                <a:latin typeface="Calibri"/>
+              </a:rPr>
+              <a:t>CONFIDENTIEL</a:t>
             </a:r>
           </a:p>
         </p:txBody>
@@ -3461,14 +5406,143 @@
       <p:grpSpPr/>
       <p:sp>
         <p:nvSpPr>
-          <p:cNvPr id="2" name="TextBox 1"/>
+          <p:cNvPr id="2" name="Rectangle 1"/>
+          <p:cNvSpPr/>
+          <p:nvPr/>
+        </p:nvSpPr>
+        <p:spPr>
+          <a:xfrm>
+            <a:off x="0" y="0"/>
+            <a:ext cx="320040" cy="6858000"/>
+          </a:xfrm>
+          <a:prstGeom prst="rect">
+            <a:avLst/>
+          </a:prstGeom>
+          <a:solidFill>
+            <a:srgbClr val="1B2A4A"/>
+          </a:solidFill>
+          <a:ln>
+            <a:noFill/>
+          </a:ln>
+        </p:spPr>
+        <p:style>
+          <a:lnRef idx="1">
+            <a:schemeClr val="accent1"/>
+          </a:lnRef>
+          <a:fillRef idx="3">
+            <a:schemeClr val="accent1"/>
+          </a:fillRef>
+          <a:effectRef idx="2">
+            <a:schemeClr val="accent1"/>
+          </a:effectRef>
+          <a:fontRef idx="minor">
+            <a:schemeClr val="lt1"/>
+          </a:fontRef>
+        </p:style>
+        <p:txBody>
+          <a:bodyPr rtlCol="0" anchor="ctr"/>
+          <a:lstStyle/>
+          <a:p>
+            <a:pPr algn="ctr"/>
+          </a:p>
+        </p:txBody>
+      </p:sp>
+      <p:sp>
+        <p:nvSpPr>
+          <p:cNvPr id="3" name="Rectangle 2"/>
+          <p:cNvSpPr/>
+          <p:nvPr/>
+        </p:nvSpPr>
+        <p:spPr>
+          <a:xfrm>
+            <a:off x="320040" y="0"/>
+            <a:ext cx="11871655" cy="36576"/>
+          </a:xfrm>
+          <a:prstGeom prst="rect">
+            <a:avLst/>
+          </a:prstGeom>
+          <a:solidFill>
+            <a:srgbClr val="C5A55A"/>
+          </a:solidFill>
+          <a:ln>
+            <a:noFill/>
+          </a:ln>
+        </p:spPr>
+        <p:style>
+          <a:lnRef idx="1">
+            <a:schemeClr val="accent1"/>
+          </a:lnRef>
+          <a:fillRef idx="3">
+            <a:schemeClr val="accent1"/>
+          </a:fillRef>
+          <a:effectRef idx="2">
+            <a:schemeClr val="accent1"/>
+          </a:effectRef>
+          <a:fontRef idx="minor">
+            <a:schemeClr val="lt1"/>
+          </a:fontRef>
+        </p:style>
+        <p:txBody>
+          <a:bodyPr rtlCol="0" anchor="ctr"/>
+          <a:lstStyle/>
+          <a:p>
+            <a:pPr algn="ctr"/>
+          </a:p>
+        </p:txBody>
+      </p:sp>
+      <p:sp>
+        <p:nvSpPr>
+          <p:cNvPr id="4" name="Rectangle 3"/>
+          <p:cNvSpPr/>
+          <p:nvPr/>
+        </p:nvSpPr>
+        <p:spPr>
+          <a:xfrm>
+            <a:off x="320040" y="36576"/>
+            <a:ext cx="11871655" cy="1005840"/>
+          </a:xfrm>
+          <a:prstGeom prst="rect">
+            <a:avLst/>
+          </a:prstGeom>
+          <a:solidFill>
+            <a:srgbClr val="F5F3EF"/>
+          </a:solidFill>
+          <a:ln>
+            <a:noFill/>
+          </a:ln>
+        </p:spPr>
+        <p:style>
+          <a:lnRef idx="1">
+            <a:schemeClr val="accent1"/>
+          </a:lnRef>
+          <a:fillRef idx="3">
+            <a:schemeClr val="accent1"/>
+          </a:fillRef>
+          <a:effectRef idx="2">
+            <a:schemeClr val="accent1"/>
+          </a:effectRef>
+          <a:fontRef idx="minor">
+            <a:schemeClr val="lt1"/>
+          </a:fontRef>
+        </p:style>
+        <p:txBody>
+          <a:bodyPr rtlCol="0" anchor="ctr"/>
+          <a:lstStyle/>
+          <a:p>
+            <a:pPr algn="ctr"/>
+          </a:p>
+        </p:txBody>
+      </p:sp>
+      <p:sp>
+        <p:nvSpPr>
+          <p:cNvPr id="5" name="TextBox 4"/>
           <p:cNvSpPr txBox="1"/>
           <p:nvPr/>
         </p:nvSpPr>
         <p:spPr>
           <a:xfrm>
-            <a:off x="457200" y="365760"/>
-            <a:ext cx="11247120" cy="822960"/>
+            <a:off x="822960" y="164592"/>
+            <a:ext cx="10515600" cy="731520"/>
           </a:xfrm>
           <a:prstGeom prst="rect">
             <a:avLst/>
@@ -3476,18 +5550,191 @@
           <a:noFill/>
         </p:spPr>
         <p:txBody>
-          <a:bodyPr wrap="none">
-            <a:spAutoFit/>
-          </a:bodyPr>
-          <a:lstStyle/>
-          <a:p>
-            <a:r>
-              <a:rPr sz="2400" b="1">
+          <a:bodyPr wrap="square"/>
+          <a:lstStyle/>
+          <a:p>
+            <a:pPr algn="l">
+              <a:spcBef>
+                <a:spcPts val="0"/>
+              </a:spcBef>
+              <a:spcAft>
+                <a:spcPts val="0"/>
+              </a:spcAft>
+            </a:pPr>
+            <a:r>
+              <a:rPr sz="2200" b="1">
                 <a:solidFill>
-                  <a:srgbClr val="0B3D91"/>
+                  <a:srgbClr val="1B2A4A"/>
                 </a:solidFill>
+                <a:latin typeface="Calibri"/>
               </a:rPr>
               <a:t>[2/15] Thèse</a:t>
+            </a:r>
+          </a:p>
+        </p:txBody>
+      </p:sp>
+      <p:sp>
+        <p:nvSpPr>
+          <p:cNvPr id="6" name="Rectangle 5"/>
+          <p:cNvSpPr/>
+          <p:nvPr/>
+        </p:nvSpPr>
+        <p:spPr>
+          <a:xfrm>
+            <a:off x="822960" y="1042415"/>
+            <a:ext cx="10058400" cy="18288"/>
+          </a:xfrm>
+          <a:prstGeom prst="rect">
+            <a:avLst/>
+          </a:prstGeom>
+          <a:solidFill>
+            <a:srgbClr val="6C757D"/>
+          </a:solidFill>
+          <a:ln>
+            <a:noFill/>
+          </a:ln>
+        </p:spPr>
+        <p:style>
+          <a:lnRef idx="1">
+            <a:schemeClr val="accent1"/>
+          </a:lnRef>
+          <a:fillRef idx="3">
+            <a:schemeClr val="accent1"/>
+          </a:fillRef>
+          <a:effectRef idx="2">
+            <a:schemeClr val="accent1"/>
+          </a:effectRef>
+          <a:fontRef idx="minor">
+            <a:schemeClr val="lt1"/>
+          </a:fontRef>
+        </p:style>
+        <p:txBody>
+          <a:bodyPr rtlCol="0" anchor="ctr"/>
+          <a:lstStyle/>
+          <a:p>
+            <a:pPr algn="ctr"/>
+          </a:p>
+        </p:txBody>
+      </p:sp>
+      <p:sp>
+        <p:nvSpPr>
+          <p:cNvPr id="7" name="Rectangle 6"/>
+          <p:cNvSpPr/>
+          <p:nvPr/>
+        </p:nvSpPr>
+        <p:spPr>
+          <a:xfrm>
+            <a:off x="822960" y="6446520"/>
+            <a:ext cx="10515600" cy="9144"/>
+          </a:xfrm>
+          <a:prstGeom prst="rect">
+            <a:avLst/>
+          </a:prstGeom>
+          <a:solidFill>
+            <a:srgbClr val="6C757D"/>
+          </a:solidFill>
+          <a:ln>
+            <a:noFill/>
+          </a:ln>
+        </p:spPr>
+        <p:style>
+          <a:lnRef idx="1">
+            <a:schemeClr val="accent1"/>
+          </a:lnRef>
+          <a:fillRef idx="3">
+            <a:schemeClr val="accent1"/>
+          </a:fillRef>
+          <a:effectRef idx="2">
+            <a:schemeClr val="accent1"/>
+          </a:effectRef>
+          <a:fontRef idx="minor">
+            <a:schemeClr val="lt1"/>
+          </a:fontRef>
+        </p:style>
+        <p:txBody>
+          <a:bodyPr rtlCol="0" anchor="ctr"/>
+          <a:lstStyle/>
+          <a:p>
+            <a:pPr algn="ctr"/>
+          </a:p>
+        </p:txBody>
+      </p:sp>
+      <p:sp>
+        <p:nvSpPr>
+          <p:cNvPr id="8" name="TextBox 7"/>
+          <p:cNvSpPr txBox="1"/>
+          <p:nvPr/>
+        </p:nvSpPr>
+        <p:spPr>
+          <a:xfrm>
+            <a:off x="11155680" y="6492240"/>
+            <a:ext cx="731520" cy="274320"/>
+          </a:xfrm>
+          <a:prstGeom prst="rect">
+            <a:avLst/>
+          </a:prstGeom>
+          <a:noFill/>
+        </p:spPr>
+        <p:txBody>
+          <a:bodyPr wrap="square"/>
+          <a:lstStyle/>
+          <a:p>
+            <a:pPr algn="r">
+              <a:spcBef>
+                <a:spcPts val="0"/>
+              </a:spcBef>
+              <a:spcAft>
+                <a:spcPts val="0"/>
+              </a:spcAft>
+            </a:pPr>
+            <a:r>
+              <a:rPr sz="900" b="0">
+                <a:solidFill>
+                  <a:srgbClr val="6C757D"/>
+                </a:solidFill>
+                <a:latin typeface="Calibri"/>
+              </a:rPr>
+              <a:t>2/15</a:t>
+            </a:r>
+          </a:p>
+        </p:txBody>
+      </p:sp>
+      <p:sp>
+        <p:nvSpPr>
+          <p:cNvPr id="9" name="TextBox 8"/>
+          <p:cNvSpPr txBox="1"/>
+          <p:nvPr/>
+        </p:nvSpPr>
+        <p:spPr>
+          <a:xfrm>
+            <a:off x="822960" y="6492240"/>
+            <a:ext cx="2743200" cy="274320"/>
+          </a:xfrm>
+          <a:prstGeom prst="rect">
+            <a:avLst/>
+          </a:prstGeom>
+          <a:noFill/>
+        </p:spPr>
+        <p:txBody>
+          <a:bodyPr wrap="square"/>
+          <a:lstStyle/>
+          <a:p>
+            <a:pPr algn="l">
+              <a:spcBef>
+                <a:spcPts val="0"/>
+              </a:spcBef>
+              <a:spcAft>
+                <a:spcPts val="0"/>
+              </a:spcAft>
+            </a:pPr>
+            <a:r>
+              <a:rPr sz="800" b="0">
+                <a:solidFill>
+                  <a:srgbClr val="6C757D"/>
+                </a:solidFill>
+                <a:latin typeface="Calibri"/>
+              </a:rPr>
+              <a:t>CONFIDENTIEL</a:t>
             </a:r>
           </a:p>
         </p:txBody>
@@ -3512,14 +5759,143 @@
       <p:grpSpPr/>
       <p:sp>
         <p:nvSpPr>
-          <p:cNvPr id="2" name="TextBox 1"/>
+          <p:cNvPr id="2" name="Rectangle 1"/>
+          <p:cNvSpPr/>
+          <p:nvPr/>
+        </p:nvSpPr>
+        <p:spPr>
+          <a:xfrm>
+            <a:off x="0" y="0"/>
+            <a:ext cx="320040" cy="6858000"/>
+          </a:xfrm>
+          <a:prstGeom prst="rect">
+            <a:avLst/>
+          </a:prstGeom>
+          <a:solidFill>
+            <a:srgbClr val="1B2A4A"/>
+          </a:solidFill>
+          <a:ln>
+            <a:noFill/>
+          </a:ln>
+        </p:spPr>
+        <p:style>
+          <a:lnRef idx="1">
+            <a:schemeClr val="accent1"/>
+          </a:lnRef>
+          <a:fillRef idx="3">
+            <a:schemeClr val="accent1"/>
+          </a:fillRef>
+          <a:effectRef idx="2">
+            <a:schemeClr val="accent1"/>
+          </a:effectRef>
+          <a:fontRef idx="minor">
+            <a:schemeClr val="lt1"/>
+          </a:fontRef>
+        </p:style>
+        <p:txBody>
+          <a:bodyPr rtlCol="0" anchor="ctr"/>
+          <a:lstStyle/>
+          <a:p>
+            <a:pPr algn="ctr"/>
+          </a:p>
+        </p:txBody>
+      </p:sp>
+      <p:sp>
+        <p:nvSpPr>
+          <p:cNvPr id="3" name="Rectangle 2"/>
+          <p:cNvSpPr/>
+          <p:nvPr/>
+        </p:nvSpPr>
+        <p:spPr>
+          <a:xfrm>
+            <a:off x="320040" y="0"/>
+            <a:ext cx="11871655" cy="36576"/>
+          </a:xfrm>
+          <a:prstGeom prst="rect">
+            <a:avLst/>
+          </a:prstGeom>
+          <a:solidFill>
+            <a:srgbClr val="C5A55A"/>
+          </a:solidFill>
+          <a:ln>
+            <a:noFill/>
+          </a:ln>
+        </p:spPr>
+        <p:style>
+          <a:lnRef idx="1">
+            <a:schemeClr val="accent1"/>
+          </a:lnRef>
+          <a:fillRef idx="3">
+            <a:schemeClr val="accent1"/>
+          </a:fillRef>
+          <a:effectRef idx="2">
+            <a:schemeClr val="accent1"/>
+          </a:effectRef>
+          <a:fontRef idx="minor">
+            <a:schemeClr val="lt1"/>
+          </a:fontRef>
+        </p:style>
+        <p:txBody>
+          <a:bodyPr rtlCol="0" anchor="ctr"/>
+          <a:lstStyle/>
+          <a:p>
+            <a:pPr algn="ctr"/>
+          </a:p>
+        </p:txBody>
+      </p:sp>
+      <p:sp>
+        <p:nvSpPr>
+          <p:cNvPr id="4" name="Rectangle 3"/>
+          <p:cNvSpPr/>
+          <p:nvPr/>
+        </p:nvSpPr>
+        <p:spPr>
+          <a:xfrm>
+            <a:off x="320040" y="36576"/>
+            <a:ext cx="11871655" cy="1005840"/>
+          </a:xfrm>
+          <a:prstGeom prst="rect">
+            <a:avLst/>
+          </a:prstGeom>
+          <a:solidFill>
+            <a:srgbClr val="F5F3EF"/>
+          </a:solidFill>
+          <a:ln>
+            <a:noFill/>
+          </a:ln>
+        </p:spPr>
+        <p:style>
+          <a:lnRef idx="1">
+            <a:schemeClr val="accent1"/>
+          </a:lnRef>
+          <a:fillRef idx="3">
+            <a:schemeClr val="accent1"/>
+          </a:fillRef>
+          <a:effectRef idx="2">
+            <a:schemeClr val="accent1"/>
+          </a:effectRef>
+          <a:fontRef idx="minor">
+            <a:schemeClr val="lt1"/>
+          </a:fontRef>
+        </p:style>
+        <p:txBody>
+          <a:bodyPr rtlCol="0" anchor="ctr"/>
+          <a:lstStyle/>
+          <a:p>
+            <a:pPr algn="ctr"/>
+          </a:p>
+        </p:txBody>
+      </p:sp>
+      <p:sp>
+        <p:nvSpPr>
+          <p:cNvPr id="5" name="TextBox 4"/>
           <p:cNvSpPr txBox="1"/>
           <p:nvPr/>
         </p:nvSpPr>
         <p:spPr>
           <a:xfrm>
-            <a:off x="457200" y="365760"/>
-            <a:ext cx="11247120" cy="822960"/>
+            <a:off x="822960" y="164592"/>
+            <a:ext cx="10515600" cy="731520"/>
           </a:xfrm>
           <a:prstGeom prst="rect">
             <a:avLst/>
@@ -3527,18 +5903,191 @@
           <a:noFill/>
         </p:spPr>
         <p:txBody>
-          <a:bodyPr wrap="none">
-            <a:spAutoFit/>
-          </a:bodyPr>
-          <a:lstStyle/>
-          <a:p>
-            <a:r>
-              <a:rPr sz="2400" b="1">
+          <a:bodyPr wrap="square"/>
+          <a:lstStyle/>
+          <a:p>
+            <a:pPr algn="l">
+              <a:spcBef>
+                <a:spcPts val="0"/>
+              </a:spcBef>
+              <a:spcAft>
+                <a:spcPts val="0"/>
+              </a:spcAft>
+            </a:pPr>
+            <a:r>
+              <a:rPr sz="2200" b="1">
                 <a:solidFill>
-                  <a:srgbClr val="0B3D91"/>
+                  <a:srgbClr val="1B2A4A"/>
                 </a:solidFill>
+                <a:latin typeface="Calibri"/>
               </a:rPr>
               <a:t>[3/15] Valorisation</a:t>
+            </a:r>
+          </a:p>
+        </p:txBody>
+      </p:sp>
+      <p:sp>
+        <p:nvSpPr>
+          <p:cNvPr id="6" name="Rectangle 5"/>
+          <p:cNvSpPr/>
+          <p:nvPr/>
+        </p:nvSpPr>
+        <p:spPr>
+          <a:xfrm>
+            <a:off x="822960" y="1042415"/>
+            <a:ext cx="10058400" cy="18288"/>
+          </a:xfrm>
+          <a:prstGeom prst="rect">
+            <a:avLst/>
+          </a:prstGeom>
+          <a:solidFill>
+            <a:srgbClr val="6C757D"/>
+          </a:solidFill>
+          <a:ln>
+            <a:noFill/>
+          </a:ln>
+        </p:spPr>
+        <p:style>
+          <a:lnRef idx="1">
+            <a:schemeClr val="accent1"/>
+          </a:lnRef>
+          <a:fillRef idx="3">
+            <a:schemeClr val="accent1"/>
+          </a:fillRef>
+          <a:effectRef idx="2">
+            <a:schemeClr val="accent1"/>
+          </a:effectRef>
+          <a:fontRef idx="minor">
+            <a:schemeClr val="lt1"/>
+          </a:fontRef>
+        </p:style>
+        <p:txBody>
+          <a:bodyPr rtlCol="0" anchor="ctr"/>
+          <a:lstStyle/>
+          <a:p>
+            <a:pPr algn="ctr"/>
+          </a:p>
+        </p:txBody>
+      </p:sp>
+      <p:sp>
+        <p:nvSpPr>
+          <p:cNvPr id="7" name="Rectangle 6"/>
+          <p:cNvSpPr/>
+          <p:nvPr/>
+        </p:nvSpPr>
+        <p:spPr>
+          <a:xfrm>
+            <a:off x="822960" y="6446520"/>
+            <a:ext cx="10515600" cy="9144"/>
+          </a:xfrm>
+          <a:prstGeom prst="rect">
+            <a:avLst/>
+          </a:prstGeom>
+          <a:solidFill>
+            <a:srgbClr val="6C757D"/>
+          </a:solidFill>
+          <a:ln>
+            <a:noFill/>
+          </a:ln>
+        </p:spPr>
+        <p:style>
+          <a:lnRef idx="1">
+            <a:schemeClr val="accent1"/>
+          </a:lnRef>
+          <a:fillRef idx="3">
+            <a:schemeClr val="accent1"/>
+          </a:fillRef>
+          <a:effectRef idx="2">
+            <a:schemeClr val="accent1"/>
+          </a:effectRef>
+          <a:fontRef idx="minor">
+            <a:schemeClr val="lt1"/>
+          </a:fontRef>
+        </p:style>
+        <p:txBody>
+          <a:bodyPr rtlCol="0" anchor="ctr"/>
+          <a:lstStyle/>
+          <a:p>
+            <a:pPr algn="ctr"/>
+          </a:p>
+        </p:txBody>
+      </p:sp>
+      <p:sp>
+        <p:nvSpPr>
+          <p:cNvPr id="8" name="TextBox 7"/>
+          <p:cNvSpPr txBox="1"/>
+          <p:nvPr/>
+        </p:nvSpPr>
+        <p:spPr>
+          <a:xfrm>
+            <a:off x="11155680" y="6492240"/>
+            <a:ext cx="731520" cy="274320"/>
+          </a:xfrm>
+          <a:prstGeom prst="rect">
+            <a:avLst/>
+          </a:prstGeom>
+          <a:noFill/>
+        </p:spPr>
+        <p:txBody>
+          <a:bodyPr wrap="square"/>
+          <a:lstStyle/>
+          <a:p>
+            <a:pPr algn="r">
+              <a:spcBef>
+                <a:spcPts val="0"/>
+              </a:spcBef>
+              <a:spcAft>
+                <a:spcPts val="0"/>
+              </a:spcAft>
+            </a:pPr>
+            <a:r>
+              <a:rPr sz="900" b="0">
+                <a:solidFill>
+                  <a:srgbClr val="6C757D"/>
+                </a:solidFill>
+                <a:latin typeface="Calibri"/>
+              </a:rPr>
+              <a:t>3/15</a:t>
+            </a:r>
+          </a:p>
+        </p:txBody>
+      </p:sp>
+      <p:sp>
+        <p:nvSpPr>
+          <p:cNvPr id="9" name="TextBox 8"/>
+          <p:cNvSpPr txBox="1"/>
+          <p:nvPr/>
+        </p:nvSpPr>
+        <p:spPr>
+          <a:xfrm>
+            <a:off x="822960" y="6492240"/>
+            <a:ext cx="2743200" cy="274320"/>
+          </a:xfrm>
+          <a:prstGeom prst="rect">
+            <a:avLst/>
+          </a:prstGeom>
+          <a:noFill/>
+        </p:spPr>
+        <p:txBody>
+          <a:bodyPr wrap="square"/>
+          <a:lstStyle/>
+          <a:p>
+            <a:pPr algn="l">
+              <a:spcBef>
+                <a:spcPts val="0"/>
+              </a:spcBef>
+              <a:spcAft>
+                <a:spcPts val="0"/>
+              </a:spcAft>
+            </a:pPr>
+            <a:r>
+              <a:rPr sz="800" b="0">
+                <a:solidFill>
+                  <a:srgbClr val="6C757D"/>
+                </a:solidFill>
+                <a:latin typeface="Calibri"/>
+              </a:rPr>
+              <a:t>CONFIDENTIEL</a:t>
             </a:r>
           </a:p>
         </p:txBody>
@@ -3563,14 +6112,143 @@
       <p:grpSpPr/>
       <p:sp>
         <p:nvSpPr>
-          <p:cNvPr id="2" name="TextBox 1"/>
+          <p:cNvPr id="2" name="Rectangle 1"/>
+          <p:cNvSpPr/>
+          <p:nvPr/>
+        </p:nvSpPr>
+        <p:spPr>
+          <a:xfrm>
+            <a:off x="0" y="0"/>
+            <a:ext cx="320040" cy="6858000"/>
+          </a:xfrm>
+          <a:prstGeom prst="rect">
+            <a:avLst/>
+          </a:prstGeom>
+          <a:solidFill>
+            <a:srgbClr val="1B2A4A"/>
+          </a:solidFill>
+          <a:ln>
+            <a:noFill/>
+          </a:ln>
+        </p:spPr>
+        <p:style>
+          <a:lnRef idx="1">
+            <a:schemeClr val="accent1"/>
+          </a:lnRef>
+          <a:fillRef idx="3">
+            <a:schemeClr val="accent1"/>
+          </a:fillRef>
+          <a:effectRef idx="2">
+            <a:schemeClr val="accent1"/>
+          </a:effectRef>
+          <a:fontRef idx="minor">
+            <a:schemeClr val="lt1"/>
+          </a:fontRef>
+        </p:style>
+        <p:txBody>
+          <a:bodyPr rtlCol="0" anchor="ctr"/>
+          <a:lstStyle/>
+          <a:p>
+            <a:pPr algn="ctr"/>
+          </a:p>
+        </p:txBody>
+      </p:sp>
+      <p:sp>
+        <p:nvSpPr>
+          <p:cNvPr id="3" name="Rectangle 2"/>
+          <p:cNvSpPr/>
+          <p:nvPr/>
+        </p:nvSpPr>
+        <p:spPr>
+          <a:xfrm>
+            <a:off x="320040" y="0"/>
+            <a:ext cx="11871655" cy="36576"/>
+          </a:xfrm>
+          <a:prstGeom prst="rect">
+            <a:avLst/>
+          </a:prstGeom>
+          <a:solidFill>
+            <a:srgbClr val="C5A55A"/>
+          </a:solidFill>
+          <a:ln>
+            <a:noFill/>
+          </a:ln>
+        </p:spPr>
+        <p:style>
+          <a:lnRef idx="1">
+            <a:schemeClr val="accent1"/>
+          </a:lnRef>
+          <a:fillRef idx="3">
+            <a:schemeClr val="accent1"/>
+          </a:fillRef>
+          <a:effectRef idx="2">
+            <a:schemeClr val="accent1"/>
+          </a:effectRef>
+          <a:fontRef idx="minor">
+            <a:schemeClr val="lt1"/>
+          </a:fontRef>
+        </p:style>
+        <p:txBody>
+          <a:bodyPr rtlCol="0" anchor="ctr"/>
+          <a:lstStyle/>
+          <a:p>
+            <a:pPr algn="ctr"/>
+          </a:p>
+        </p:txBody>
+      </p:sp>
+      <p:sp>
+        <p:nvSpPr>
+          <p:cNvPr id="4" name="Rectangle 3"/>
+          <p:cNvSpPr/>
+          <p:nvPr/>
+        </p:nvSpPr>
+        <p:spPr>
+          <a:xfrm>
+            <a:off x="320040" y="36576"/>
+            <a:ext cx="11871655" cy="1005840"/>
+          </a:xfrm>
+          <a:prstGeom prst="rect">
+            <a:avLst/>
+          </a:prstGeom>
+          <a:solidFill>
+            <a:srgbClr val="F5F3EF"/>
+          </a:solidFill>
+          <a:ln>
+            <a:noFill/>
+          </a:ln>
+        </p:spPr>
+        <p:style>
+          <a:lnRef idx="1">
+            <a:schemeClr val="accent1"/>
+          </a:lnRef>
+          <a:fillRef idx="3">
+            <a:schemeClr val="accent1"/>
+          </a:fillRef>
+          <a:effectRef idx="2">
+            <a:schemeClr val="accent1"/>
+          </a:effectRef>
+          <a:fontRef idx="minor">
+            <a:schemeClr val="lt1"/>
+          </a:fontRef>
+        </p:style>
+        <p:txBody>
+          <a:bodyPr rtlCol="0" anchor="ctr"/>
+          <a:lstStyle/>
+          <a:p>
+            <a:pPr algn="ctr"/>
+          </a:p>
+        </p:txBody>
+      </p:sp>
+      <p:sp>
+        <p:nvSpPr>
+          <p:cNvPr id="5" name="TextBox 4"/>
           <p:cNvSpPr txBox="1"/>
           <p:nvPr/>
         </p:nvSpPr>
         <p:spPr>
           <a:xfrm>
-            <a:off x="457200" y="365760"/>
-            <a:ext cx="11247120" cy="822960"/>
+            <a:off x="822960" y="164592"/>
+            <a:ext cx="10515600" cy="731520"/>
           </a:xfrm>
           <a:prstGeom prst="rect">
             <a:avLst/>
@@ -3578,18 +6256,191 @@
           <a:noFill/>
         </p:spPr>
         <p:txBody>
-          <a:bodyPr wrap="none">
-            <a:spAutoFit/>
-          </a:bodyPr>
-          <a:lstStyle/>
-          <a:p>
-            <a:r>
-              <a:rPr sz="2400" b="1">
+          <a:bodyPr wrap="square"/>
+          <a:lstStyle/>
+          <a:p>
+            <a:pPr algn="l">
+              <a:spcBef>
+                <a:spcPts val="0"/>
+              </a:spcBef>
+              <a:spcAft>
+                <a:spcPts val="0"/>
+              </a:spcAft>
+            </a:pPr>
+            <a:r>
+              <a:rPr sz="2200" b="1">
                 <a:solidFill>
-                  <a:srgbClr val="0B3D91"/>
+                  <a:srgbClr val="1B2A4A"/>
                 </a:solidFill>
+                <a:latin typeface="Calibri"/>
               </a:rPr>
               <a:t>[4/15] DCF</a:t>
+            </a:r>
+          </a:p>
+        </p:txBody>
+      </p:sp>
+      <p:sp>
+        <p:nvSpPr>
+          <p:cNvPr id="6" name="Rectangle 5"/>
+          <p:cNvSpPr/>
+          <p:nvPr/>
+        </p:nvSpPr>
+        <p:spPr>
+          <a:xfrm>
+            <a:off x="822960" y="1042415"/>
+            <a:ext cx="10058400" cy="18288"/>
+          </a:xfrm>
+          <a:prstGeom prst="rect">
+            <a:avLst/>
+          </a:prstGeom>
+          <a:solidFill>
+            <a:srgbClr val="6C757D"/>
+          </a:solidFill>
+          <a:ln>
+            <a:noFill/>
+          </a:ln>
+        </p:spPr>
+        <p:style>
+          <a:lnRef idx="1">
+            <a:schemeClr val="accent1"/>
+          </a:lnRef>
+          <a:fillRef idx="3">
+            <a:schemeClr val="accent1"/>
+          </a:fillRef>
+          <a:effectRef idx="2">
+            <a:schemeClr val="accent1"/>
+          </a:effectRef>
+          <a:fontRef idx="minor">
+            <a:schemeClr val="lt1"/>
+          </a:fontRef>
+        </p:style>
+        <p:txBody>
+          <a:bodyPr rtlCol="0" anchor="ctr"/>
+          <a:lstStyle/>
+          <a:p>
+            <a:pPr algn="ctr"/>
+          </a:p>
+        </p:txBody>
+      </p:sp>
+      <p:sp>
+        <p:nvSpPr>
+          <p:cNvPr id="7" name="Rectangle 6"/>
+          <p:cNvSpPr/>
+          <p:nvPr/>
+        </p:nvSpPr>
+        <p:spPr>
+          <a:xfrm>
+            <a:off x="822960" y="6446520"/>
+            <a:ext cx="10515600" cy="9144"/>
+          </a:xfrm>
+          <a:prstGeom prst="rect">
+            <a:avLst/>
+          </a:prstGeom>
+          <a:solidFill>
+            <a:srgbClr val="6C757D"/>
+          </a:solidFill>
+          <a:ln>
+            <a:noFill/>
+          </a:ln>
+        </p:spPr>
+        <p:style>
+          <a:lnRef idx="1">
+            <a:schemeClr val="accent1"/>
+          </a:lnRef>
+          <a:fillRef idx="3">
+            <a:schemeClr val="accent1"/>
+          </a:fillRef>
+          <a:effectRef idx="2">
+            <a:schemeClr val="accent1"/>
+          </a:effectRef>
+          <a:fontRef idx="minor">
+            <a:schemeClr val="lt1"/>
+          </a:fontRef>
+        </p:style>
+        <p:txBody>
+          <a:bodyPr rtlCol="0" anchor="ctr"/>
+          <a:lstStyle/>
+          <a:p>
+            <a:pPr algn="ctr"/>
+          </a:p>
+        </p:txBody>
+      </p:sp>
+      <p:sp>
+        <p:nvSpPr>
+          <p:cNvPr id="8" name="TextBox 7"/>
+          <p:cNvSpPr txBox="1"/>
+          <p:nvPr/>
+        </p:nvSpPr>
+        <p:spPr>
+          <a:xfrm>
+            <a:off x="11155680" y="6492240"/>
+            <a:ext cx="731520" cy="274320"/>
+          </a:xfrm>
+          <a:prstGeom prst="rect">
+            <a:avLst/>
+          </a:prstGeom>
+          <a:noFill/>
+        </p:spPr>
+        <p:txBody>
+          <a:bodyPr wrap="square"/>
+          <a:lstStyle/>
+          <a:p>
+            <a:pPr algn="r">
+              <a:spcBef>
+                <a:spcPts val="0"/>
+              </a:spcBef>
+              <a:spcAft>
+                <a:spcPts val="0"/>
+              </a:spcAft>
+            </a:pPr>
+            <a:r>
+              <a:rPr sz="900" b="0">
+                <a:solidFill>
+                  <a:srgbClr val="6C757D"/>
+                </a:solidFill>
+                <a:latin typeface="Calibri"/>
+              </a:rPr>
+              <a:t>4/15</a:t>
+            </a:r>
+          </a:p>
+        </p:txBody>
+      </p:sp>
+      <p:sp>
+        <p:nvSpPr>
+          <p:cNvPr id="9" name="TextBox 8"/>
+          <p:cNvSpPr txBox="1"/>
+          <p:nvPr/>
+        </p:nvSpPr>
+        <p:spPr>
+          <a:xfrm>
+            <a:off x="822960" y="6492240"/>
+            <a:ext cx="2743200" cy="274320"/>
+          </a:xfrm>
+          <a:prstGeom prst="rect">
+            <a:avLst/>
+          </a:prstGeom>
+          <a:noFill/>
+        </p:spPr>
+        <p:txBody>
+          <a:bodyPr wrap="square"/>
+          <a:lstStyle/>
+          <a:p>
+            <a:pPr algn="l">
+              <a:spcBef>
+                <a:spcPts val="0"/>
+              </a:spcBef>
+              <a:spcAft>
+                <a:spcPts val="0"/>
+              </a:spcAft>
+            </a:pPr>
+            <a:r>
+              <a:rPr sz="800" b="0">
+                <a:solidFill>
+                  <a:srgbClr val="6C757D"/>
+                </a:solidFill>
+                <a:latin typeface="Calibri"/>
+              </a:rPr>
+              <a:t>CONFIDENTIEL</a:t>
             </a:r>
           </a:p>
         </p:txBody>
@@ -3614,14 +6465,143 @@
       <p:grpSpPr/>
       <p:sp>
         <p:nvSpPr>
-          <p:cNvPr id="2" name="TextBox 1"/>
+          <p:cNvPr id="2" name="Rectangle 1"/>
+          <p:cNvSpPr/>
+          <p:nvPr/>
+        </p:nvSpPr>
+        <p:spPr>
+          <a:xfrm>
+            <a:off x="0" y="0"/>
+            <a:ext cx="320040" cy="6858000"/>
+          </a:xfrm>
+          <a:prstGeom prst="rect">
+            <a:avLst/>
+          </a:prstGeom>
+          <a:solidFill>
+            <a:srgbClr val="1B2A4A"/>
+          </a:solidFill>
+          <a:ln>
+            <a:noFill/>
+          </a:ln>
+        </p:spPr>
+        <p:style>
+          <a:lnRef idx="1">
+            <a:schemeClr val="accent1"/>
+          </a:lnRef>
+          <a:fillRef idx="3">
+            <a:schemeClr val="accent1"/>
+          </a:fillRef>
+          <a:effectRef idx="2">
+            <a:schemeClr val="accent1"/>
+          </a:effectRef>
+          <a:fontRef idx="minor">
+            <a:schemeClr val="lt1"/>
+          </a:fontRef>
+        </p:style>
+        <p:txBody>
+          <a:bodyPr rtlCol="0" anchor="ctr"/>
+          <a:lstStyle/>
+          <a:p>
+            <a:pPr algn="ctr"/>
+          </a:p>
+        </p:txBody>
+      </p:sp>
+      <p:sp>
+        <p:nvSpPr>
+          <p:cNvPr id="3" name="Rectangle 2"/>
+          <p:cNvSpPr/>
+          <p:nvPr/>
+        </p:nvSpPr>
+        <p:spPr>
+          <a:xfrm>
+            <a:off x="320040" y="0"/>
+            <a:ext cx="11871655" cy="36576"/>
+          </a:xfrm>
+          <a:prstGeom prst="rect">
+            <a:avLst/>
+          </a:prstGeom>
+          <a:solidFill>
+            <a:srgbClr val="C5A55A"/>
+          </a:solidFill>
+          <a:ln>
+            <a:noFill/>
+          </a:ln>
+        </p:spPr>
+        <p:style>
+          <a:lnRef idx="1">
+            <a:schemeClr val="accent1"/>
+          </a:lnRef>
+          <a:fillRef idx="3">
+            <a:schemeClr val="accent1"/>
+          </a:fillRef>
+          <a:effectRef idx="2">
+            <a:schemeClr val="accent1"/>
+          </a:effectRef>
+          <a:fontRef idx="minor">
+            <a:schemeClr val="lt1"/>
+          </a:fontRef>
+        </p:style>
+        <p:txBody>
+          <a:bodyPr rtlCol="0" anchor="ctr"/>
+          <a:lstStyle/>
+          <a:p>
+            <a:pPr algn="ctr"/>
+          </a:p>
+        </p:txBody>
+      </p:sp>
+      <p:sp>
+        <p:nvSpPr>
+          <p:cNvPr id="4" name="Rectangle 3"/>
+          <p:cNvSpPr/>
+          <p:nvPr/>
+        </p:nvSpPr>
+        <p:spPr>
+          <a:xfrm>
+            <a:off x="320040" y="36576"/>
+            <a:ext cx="11871655" cy="1005840"/>
+          </a:xfrm>
+          <a:prstGeom prst="rect">
+            <a:avLst/>
+          </a:prstGeom>
+          <a:solidFill>
+            <a:srgbClr val="F5F3EF"/>
+          </a:solidFill>
+          <a:ln>
+            <a:noFill/>
+          </a:ln>
+        </p:spPr>
+        <p:style>
+          <a:lnRef idx="1">
+            <a:schemeClr val="accent1"/>
+          </a:lnRef>
+          <a:fillRef idx="3">
+            <a:schemeClr val="accent1"/>
+          </a:fillRef>
+          <a:effectRef idx="2">
+            <a:schemeClr val="accent1"/>
+          </a:effectRef>
+          <a:fontRef idx="minor">
+            <a:schemeClr val="lt1"/>
+          </a:fontRef>
+        </p:style>
+        <p:txBody>
+          <a:bodyPr rtlCol="0" anchor="ctr"/>
+          <a:lstStyle/>
+          <a:p>
+            <a:pPr algn="ctr"/>
+          </a:p>
+        </p:txBody>
+      </p:sp>
+      <p:sp>
+        <p:nvSpPr>
+          <p:cNvPr id="5" name="TextBox 4"/>
           <p:cNvSpPr txBox="1"/>
           <p:nvPr/>
         </p:nvSpPr>
         <p:spPr>
           <a:xfrm>
-            <a:off x="457200" y="365760"/>
-            <a:ext cx="11247120" cy="822960"/>
+            <a:off x="822960" y="164592"/>
+            <a:ext cx="10515600" cy="731520"/>
           </a:xfrm>
           <a:prstGeom prst="rect">
             <a:avLst/>
@@ -3629,18 +6609,191 @@
           <a:noFill/>
         </p:spPr>
         <p:txBody>
-          <a:bodyPr wrap="none">
-            <a:spAutoFit/>
-          </a:bodyPr>
-          <a:lstStyle/>
-          <a:p>
-            <a:r>
-              <a:rPr sz="2400" b="1">
+          <a:bodyPr wrap="square"/>
+          <a:lstStyle/>
+          <a:p>
+            <a:pPr algn="l">
+              <a:spcBef>
+                <a:spcPts val="0"/>
+              </a:spcBef>
+              <a:spcAft>
+                <a:spcPts val="0"/>
+              </a:spcAft>
+            </a:pPr>
+            <a:r>
+              <a:rPr sz="2200" b="1">
                 <a:solidFill>
-                  <a:srgbClr val="0B3D91"/>
+                  <a:srgbClr val="1B2A4A"/>
                 </a:solidFill>
+                <a:latin typeface="Calibri"/>
               </a:rPr>
               <a:t>[5/15] Comps</a:t>
+            </a:r>
+          </a:p>
+        </p:txBody>
+      </p:sp>
+      <p:sp>
+        <p:nvSpPr>
+          <p:cNvPr id="6" name="Rectangle 5"/>
+          <p:cNvSpPr/>
+          <p:nvPr/>
+        </p:nvSpPr>
+        <p:spPr>
+          <a:xfrm>
+            <a:off x="822960" y="1042415"/>
+            <a:ext cx="10058400" cy="18288"/>
+          </a:xfrm>
+          <a:prstGeom prst="rect">
+            <a:avLst/>
+          </a:prstGeom>
+          <a:solidFill>
+            <a:srgbClr val="6C757D"/>
+          </a:solidFill>
+          <a:ln>
+            <a:noFill/>
+          </a:ln>
+        </p:spPr>
+        <p:style>
+          <a:lnRef idx="1">
+            <a:schemeClr val="accent1"/>
+          </a:lnRef>
+          <a:fillRef idx="3">
+            <a:schemeClr val="accent1"/>
+          </a:fillRef>
+          <a:effectRef idx="2">
+            <a:schemeClr val="accent1"/>
+          </a:effectRef>
+          <a:fontRef idx="minor">
+            <a:schemeClr val="lt1"/>
+          </a:fontRef>
+        </p:style>
+        <p:txBody>
+          <a:bodyPr rtlCol="0" anchor="ctr"/>
+          <a:lstStyle/>
+          <a:p>
+            <a:pPr algn="ctr"/>
+          </a:p>
+        </p:txBody>
+      </p:sp>
+      <p:sp>
+        <p:nvSpPr>
+          <p:cNvPr id="7" name="Rectangle 6"/>
+          <p:cNvSpPr/>
+          <p:nvPr/>
+        </p:nvSpPr>
+        <p:spPr>
+          <a:xfrm>
+            <a:off x="822960" y="6446520"/>
+            <a:ext cx="10515600" cy="9144"/>
+          </a:xfrm>
+          <a:prstGeom prst="rect">
+            <a:avLst/>
+          </a:prstGeom>
+          <a:solidFill>
+            <a:srgbClr val="6C757D"/>
+          </a:solidFill>
+          <a:ln>
+            <a:noFill/>
+          </a:ln>
+        </p:spPr>
+        <p:style>
+          <a:lnRef idx="1">
+            <a:schemeClr val="accent1"/>
+          </a:lnRef>
+          <a:fillRef idx="3">
+            <a:schemeClr val="accent1"/>
+          </a:fillRef>
+          <a:effectRef idx="2">
+            <a:schemeClr val="accent1"/>
+          </a:effectRef>
+          <a:fontRef idx="minor">
+            <a:schemeClr val="lt1"/>
+          </a:fontRef>
+        </p:style>
+        <p:txBody>
+          <a:bodyPr rtlCol="0" anchor="ctr"/>
+          <a:lstStyle/>
+          <a:p>
+            <a:pPr algn="ctr"/>
+          </a:p>
+        </p:txBody>
+      </p:sp>
+      <p:sp>
+        <p:nvSpPr>
+          <p:cNvPr id="8" name="TextBox 7"/>
+          <p:cNvSpPr txBox="1"/>
+          <p:nvPr/>
+        </p:nvSpPr>
+        <p:spPr>
+          <a:xfrm>
+            <a:off x="11155680" y="6492240"/>
+            <a:ext cx="731520" cy="274320"/>
+          </a:xfrm>
+          <a:prstGeom prst="rect">
+            <a:avLst/>
+          </a:prstGeom>
+          <a:noFill/>
+        </p:spPr>
+        <p:txBody>
+          <a:bodyPr wrap="square"/>
+          <a:lstStyle/>
+          <a:p>
+            <a:pPr algn="r">
+              <a:spcBef>
+                <a:spcPts val="0"/>
+              </a:spcBef>
+              <a:spcAft>
+                <a:spcPts val="0"/>
+              </a:spcAft>
+            </a:pPr>
+            <a:r>
+              <a:rPr sz="900" b="0">
+                <a:solidFill>
+                  <a:srgbClr val="6C757D"/>
+                </a:solidFill>
+                <a:latin typeface="Calibri"/>
+              </a:rPr>
+              <a:t>5/15</a:t>
+            </a:r>
+          </a:p>
+        </p:txBody>
+      </p:sp>
+      <p:sp>
+        <p:nvSpPr>
+          <p:cNvPr id="9" name="TextBox 8"/>
+          <p:cNvSpPr txBox="1"/>
+          <p:nvPr/>
+        </p:nvSpPr>
+        <p:spPr>
+          <a:xfrm>
+            <a:off x="822960" y="6492240"/>
+            <a:ext cx="2743200" cy="274320"/>
+          </a:xfrm>
+          <a:prstGeom prst="rect">
+            <a:avLst/>
+          </a:prstGeom>
+          <a:noFill/>
+        </p:spPr>
+        <p:txBody>
+          <a:bodyPr wrap="square"/>
+          <a:lstStyle/>
+          <a:p>
+            <a:pPr algn="l">
+              <a:spcBef>
+                <a:spcPts val="0"/>
+              </a:spcBef>
+              <a:spcAft>
+                <a:spcPts val="0"/>
+              </a:spcAft>
+            </a:pPr>
+            <a:r>
+              <a:rPr sz="800" b="0">
+                <a:solidFill>
+                  <a:srgbClr val="6C757D"/>
+                </a:solidFill>
+                <a:latin typeface="Calibri"/>
+              </a:rPr>
+              <a:t>CONFIDENTIEL</a:t>
             </a:r>
           </a:p>
         </p:txBody>
@@ -3665,14 +6818,143 @@
       <p:grpSpPr/>
       <p:sp>
         <p:nvSpPr>
-          <p:cNvPr id="2" name="TextBox 1"/>
+          <p:cNvPr id="2" name="Rectangle 1"/>
+          <p:cNvSpPr/>
+          <p:nvPr/>
+        </p:nvSpPr>
+        <p:spPr>
+          <a:xfrm>
+            <a:off x="0" y="0"/>
+            <a:ext cx="320040" cy="6858000"/>
+          </a:xfrm>
+          <a:prstGeom prst="rect">
+            <a:avLst/>
+          </a:prstGeom>
+          <a:solidFill>
+            <a:srgbClr val="1B2A4A"/>
+          </a:solidFill>
+          <a:ln>
+            <a:noFill/>
+          </a:ln>
+        </p:spPr>
+        <p:style>
+          <a:lnRef idx="1">
+            <a:schemeClr val="accent1"/>
+          </a:lnRef>
+          <a:fillRef idx="3">
+            <a:schemeClr val="accent1"/>
+          </a:fillRef>
+          <a:effectRef idx="2">
+            <a:schemeClr val="accent1"/>
+          </a:effectRef>
+          <a:fontRef idx="minor">
+            <a:schemeClr val="lt1"/>
+          </a:fontRef>
+        </p:style>
+        <p:txBody>
+          <a:bodyPr rtlCol="0" anchor="ctr"/>
+          <a:lstStyle/>
+          <a:p>
+            <a:pPr algn="ctr"/>
+          </a:p>
+        </p:txBody>
+      </p:sp>
+      <p:sp>
+        <p:nvSpPr>
+          <p:cNvPr id="3" name="Rectangle 2"/>
+          <p:cNvSpPr/>
+          <p:nvPr/>
+        </p:nvSpPr>
+        <p:spPr>
+          <a:xfrm>
+            <a:off x="320040" y="0"/>
+            <a:ext cx="11871655" cy="36576"/>
+          </a:xfrm>
+          <a:prstGeom prst="rect">
+            <a:avLst/>
+          </a:prstGeom>
+          <a:solidFill>
+            <a:srgbClr val="C5A55A"/>
+          </a:solidFill>
+          <a:ln>
+            <a:noFill/>
+          </a:ln>
+        </p:spPr>
+        <p:style>
+          <a:lnRef idx="1">
+            <a:schemeClr val="accent1"/>
+          </a:lnRef>
+          <a:fillRef idx="3">
+            <a:schemeClr val="accent1"/>
+          </a:fillRef>
+          <a:effectRef idx="2">
+            <a:schemeClr val="accent1"/>
+          </a:effectRef>
+          <a:fontRef idx="minor">
+            <a:schemeClr val="lt1"/>
+          </a:fontRef>
+        </p:style>
+        <p:txBody>
+          <a:bodyPr rtlCol="0" anchor="ctr"/>
+          <a:lstStyle/>
+          <a:p>
+            <a:pPr algn="ctr"/>
+          </a:p>
+        </p:txBody>
+      </p:sp>
+      <p:sp>
+        <p:nvSpPr>
+          <p:cNvPr id="4" name="Rectangle 3"/>
+          <p:cNvSpPr/>
+          <p:nvPr/>
+        </p:nvSpPr>
+        <p:spPr>
+          <a:xfrm>
+            <a:off x="320040" y="36576"/>
+            <a:ext cx="11871655" cy="1005840"/>
+          </a:xfrm>
+          <a:prstGeom prst="rect">
+            <a:avLst/>
+          </a:prstGeom>
+          <a:solidFill>
+            <a:srgbClr val="F5F3EF"/>
+          </a:solidFill>
+          <a:ln>
+            <a:noFill/>
+          </a:ln>
+        </p:spPr>
+        <p:style>
+          <a:lnRef idx="1">
+            <a:schemeClr val="accent1"/>
+          </a:lnRef>
+          <a:fillRef idx="3">
+            <a:schemeClr val="accent1"/>
+          </a:fillRef>
+          <a:effectRef idx="2">
+            <a:schemeClr val="accent1"/>
+          </a:effectRef>
+          <a:fontRef idx="minor">
+            <a:schemeClr val="lt1"/>
+          </a:fontRef>
+        </p:style>
+        <p:txBody>
+          <a:bodyPr rtlCol="0" anchor="ctr"/>
+          <a:lstStyle/>
+          <a:p>
+            <a:pPr algn="ctr"/>
+          </a:p>
+        </p:txBody>
+      </p:sp>
+      <p:sp>
+        <p:nvSpPr>
+          <p:cNvPr id="5" name="TextBox 4"/>
           <p:cNvSpPr txBox="1"/>
           <p:nvPr/>
         </p:nvSpPr>
         <p:spPr>
           <a:xfrm>
-            <a:off x="457200" y="365760"/>
-            <a:ext cx="11247120" cy="822960"/>
+            <a:off x="822960" y="164592"/>
+            <a:ext cx="10515600" cy="731520"/>
           </a:xfrm>
           <a:prstGeom prst="rect">
             <a:avLst/>
@@ -3680,18 +6962,191 @@
           <a:noFill/>
         </p:spPr>
         <p:txBody>
-          <a:bodyPr wrap="none">
-            <a:spAutoFit/>
-          </a:bodyPr>
-          <a:lstStyle/>
-          <a:p>
-            <a:r>
-              <a:rPr sz="2400" b="1">
+          <a:bodyPr wrap="square"/>
+          <a:lstStyle/>
+          <a:p>
+            <a:pPr algn="l">
+              <a:spcBef>
+                <a:spcPts val="0"/>
+              </a:spcBef>
+              <a:spcAft>
+                <a:spcPts val="0"/>
+              </a:spcAft>
+            </a:pPr>
+            <a:r>
+              <a:rPr sz="2200" b="1">
                 <a:solidFill>
-                  <a:srgbClr val="0B3D91"/>
+                  <a:srgbClr val="1B2A4A"/>
                 </a:solidFill>
+                <a:latin typeface="Calibri"/>
               </a:rPr>
               <a:t>[6/15] Multiples</a:t>
+            </a:r>
+          </a:p>
+        </p:txBody>
+      </p:sp>
+      <p:sp>
+        <p:nvSpPr>
+          <p:cNvPr id="6" name="Rectangle 5"/>
+          <p:cNvSpPr/>
+          <p:nvPr/>
+        </p:nvSpPr>
+        <p:spPr>
+          <a:xfrm>
+            <a:off x="822960" y="1042415"/>
+            <a:ext cx="10058400" cy="18288"/>
+          </a:xfrm>
+          <a:prstGeom prst="rect">
+            <a:avLst/>
+          </a:prstGeom>
+          <a:solidFill>
+            <a:srgbClr val="6C757D"/>
+          </a:solidFill>
+          <a:ln>
+            <a:noFill/>
+          </a:ln>
+        </p:spPr>
+        <p:style>
+          <a:lnRef idx="1">
+            <a:schemeClr val="accent1"/>
+          </a:lnRef>
+          <a:fillRef idx="3">
+            <a:schemeClr val="accent1"/>
+          </a:fillRef>
+          <a:effectRef idx="2">
+            <a:schemeClr val="accent1"/>
+          </a:effectRef>
+          <a:fontRef idx="minor">
+            <a:schemeClr val="lt1"/>
+          </a:fontRef>
+        </p:style>
+        <p:txBody>
+          <a:bodyPr rtlCol="0" anchor="ctr"/>
+          <a:lstStyle/>
+          <a:p>
+            <a:pPr algn="ctr"/>
+          </a:p>
+        </p:txBody>
+      </p:sp>
+      <p:sp>
+        <p:nvSpPr>
+          <p:cNvPr id="7" name="Rectangle 6"/>
+          <p:cNvSpPr/>
+          <p:nvPr/>
+        </p:nvSpPr>
+        <p:spPr>
+          <a:xfrm>
+            <a:off x="822960" y="6446520"/>
+            <a:ext cx="10515600" cy="9144"/>
+          </a:xfrm>
+          <a:prstGeom prst="rect">
+            <a:avLst/>
+          </a:prstGeom>
+          <a:solidFill>
+            <a:srgbClr val="6C757D"/>
+          </a:solidFill>
+          <a:ln>
+            <a:noFill/>
+          </a:ln>
+        </p:spPr>
+        <p:style>
+          <a:lnRef idx="1">
+            <a:schemeClr val="accent1"/>
+          </a:lnRef>
+          <a:fillRef idx="3">
+            <a:schemeClr val="accent1"/>
+          </a:fillRef>
+          <a:effectRef idx="2">
+            <a:schemeClr val="accent1"/>
+          </a:effectRef>
+          <a:fontRef idx="minor">
+            <a:schemeClr val="lt1"/>
+          </a:fontRef>
+        </p:style>
+        <p:txBody>
+          <a:bodyPr rtlCol="0" anchor="ctr"/>
+          <a:lstStyle/>
+          <a:p>
+            <a:pPr algn="ctr"/>
+          </a:p>
+        </p:txBody>
+      </p:sp>
+      <p:sp>
+        <p:nvSpPr>
+          <p:cNvPr id="8" name="TextBox 7"/>
+          <p:cNvSpPr txBox="1"/>
+          <p:nvPr/>
+        </p:nvSpPr>
+        <p:spPr>
+          <a:xfrm>
+            <a:off x="11155680" y="6492240"/>
+            <a:ext cx="731520" cy="274320"/>
+          </a:xfrm>
+          <a:prstGeom prst="rect">
+            <a:avLst/>
+          </a:prstGeom>
+          <a:noFill/>
+        </p:spPr>
+        <p:txBody>
+          <a:bodyPr wrap="square"/>
+          <a:lstStyle/>
+          <a:p>
+            <a:pPr algn="r">
+              <a:spcBef>
+                <a:spcPts val="0"/>
+              </a:spcBef>
+              <a:spcAft>
+                <a:spcPts val="0"/>
+              </a:spcAft>
+            </a:pPr>
+            <a:r>
+              <a:rPr sz="900" b="0">
+                <a:solidFill>
+                  <a:srgbClr val="6C757D"/>
+                </a:solidFill>
+                <a:latin typeface="Calibri"/>
+              </a:rPr>
+              <a:t>6/15</a:t>
+            </a:r>
+          </a:p>
+        </p:txBody>
+      </p:sp>
+      <p:sp>
+        <p:nvSpPr>
+          <p:cNvPr id="9" name="TextBox 8"/>
+          <p:cNvSpPr txBox="1"/>
+          <p:nvPr/>
+        </p:nvSpPr>
+        <p:spPr>
+          <a:xfrm>
+            <a:off x="822960" y="6492240"/>
+            <a:ext cx="2743200" cy="274320"/>
+          </a:xfrm>
+          <a:prstGeom prst="rect">
+            <a:avLst/>
+          </a:prstGeom>
+          <a:noFill/>
+        </p:spPr>
+        <p:txBody>
+          <a:bodyPr wrap="square"/>
+          <a:lstStyle/>
+          <a:p>
+            <a:pPr algn="l">
+              <a:spcBef>
+                <a:spcPts val="0"/>
+              </a:spcBef>
+              <a:spcAft>
+                <a:spcPts val="0"/>
+              </a:spcAft>
+            </a:pPr>
+            <a:r>
+              <a:rPr sz="800" b="0">
+                <a:solidFill>
+                  <a:srgbClr val="6C757D"/>
+                </a:solidFill>
+                <a:latin typeface="Calibri"/>
+              </a:rPr>
+              <a:t>CONFIDENTIEL</a:t>
             </a:r>
           </a:p>
         </p:txBody>
@@ -3716,14 +7171,143 @@
       <p:grpSpPr/>
       <p:sp>
         <p:nvSpPr>
-          <p:cNvPr id="2" name="TextBox 1"/>
+          <p:cNvPr id="2" name="Rectangle 1"/>
+          <p:cNvSpPr/>
+          <p:nvPr/>
+        </p:nvSpPr>
+        <p:spPr>
+          <a:xfrm>
+            <a:off x="0" y="0"/>
+            <a:ext cx="320040" cy="6858000"/>
+          </a:xfrm>
+          <a:prstGeom prst="rect">
+            <a:avLst/>
+          </a:prstGeom>
+          <a:solidFill>
+            <a:srgbClr val="1B2A4A"/>
+          </a:solidFill>
+          <a:ln>
+            <a:noFill/>
+          </a:ln>
+        </p:spPr>
+        <p:style>
+          <a:lnRef idx="1">
+            <a:schemeClr val="accent1"/>
+          </a:lnRef>
+          <a:fillRef idx="3">
+            <a:schemeClr val="accent1"/>
+          </a:fillRef>
+          <a:effectRef idx="2">
+            <a:schemeClr val="accent1"/>
+          </a:effectRef>
+          <a:fontRef idx="minor">
+            <a:schemeClr val="lt1"/>
+          </a:fontRef>
+        </p:style>
+        <p:txBody>
+          <a:bodyPr rtlCol="0" anchor="ctr"/>
+          <a:lstStyle/>
+          <a:p>
+            <a:pPr algn="ctr"/>
+          </a:p>
+        </p:txBody>
+      </p:sp>
+      <p:sp>
+        <p:nvSpPr>
+          <p:cNvPr id="3" name="Rectangle 2"/>
+          <p:cNvSpPr/>
+          <p:nvPr/>
+        </p:nvSpPr>
+        <p:spPr>
+          <a:xfrm>
+            <a:off x="320040" y="0"/>
+            <a:ext cx="11871655" cy="36576"/>
+          </a:xfrm>
+          <a:prstGeom prst="rect">
+            <a:avLst/>
+          </a:prstGeom>
+          <a:solidFill>
+            <a:srgbClr val="C5A55A"/>
+          </a:solidFill>
+          <a:ln>
+            <a:noFill/>
+          </a:ln>
+        </p:spPr>
+        <p:style>
+          <a:lnRef idx="1">
+            <a:schemeClr val="accent1"/>
+          </a:lnRef>
+          <a:fillRef idx="3">
+            <a:schemeClr val="accent1"/>
+          </a:fillRef>
+          <a:effectRef idx="2">
+            <a:schemeClr val="accent1"/>
+          </a:effectRef>
+          <a:fontRef idx="minor">
+            <a:schemeClr val="lt1"/>
+          </a:fontRef>
+        </p:style>
+        <p:txBody>
+          <a:bodyPr rtlCol="0" anchor="ctr"/>
+          <a:lstStyle/>
+          <a:p>
+            <a:pPr algn="ctr"/>
+          </a:p>
+        </p:txBody>
+      </p:sp>
+      <p:sp>
+        <p:nvSpPr>
+          <p:cNvPr id="4" name="Rectangle 3"/>
+          <p:cNvSpPr/>
+          <p:nvPr/>
+        </p:nvSpPr>
+        <p:spPr>
+          <a:xfrm>
+            <a:off x="320040" y="36576"/>
+            <a:ext cx="11871655" cy="1005840"/>
+          </a:xfrm>
+          <a:prstGeom prst="rect">
+            <a:avLst/>
+          </a:prstGeom>
+          <a:solidFill>
+            <a:srgbClr val="F5F3EF"/>
+          </a:solidFill>
+          <a:ln>
+            <a:noFill/>
+          </a:ln>
+        </p:spPr>
+        <p:style>
+          <a:lnRef idx="1">
+            <a:schemeClr val="accent1"/>
+          </a:lnRef>
+          <a:fillRef idx="3">
+            <a:schemeClr val="accent1"/>
+          </a:fillRef>
+          <a:effectRef idx="2">
+            <a:schemeClr val="accent1"/>
+          </a:effectRef>
+          <a:fontRef idx="minor">
+            <a:schemeClr val="lt1"/>
+          </a:fontRef>
+        </p:style>
+        <p:txBody>
+          <a:bodyPr rtlCol="0" anchor="ctr"/>
+          <a:lstStyle/>
+          <a:p>
+            <a:pPr algn="ctr"/>
+          </a:p>
+        </p:txBody>
+      </p:sp>
+      <p:sp>
+        <p:nvSpPr>
+          <p:cNvPr id="5" name="TextBox 4"/>
           <p:cNvSpPr txBox="1"/>
           <p:nvPr/>
         </p:nvSpPr>
         <p:spPr>
           <a:xfrm>
-            <a:off x="457200" y="365760"/>
-            <a:ext cx="11247120" cy="822960"/>
+            <a:off x="822960" y="164592"/>
+            <a:ext cx="10515600" cy="731520"/>
           </a:xfrm>
           <a:prstGeom prst="rect">
             <a:avLst/>
@@ -3731,18 +7315,191 @@
           <a:noFill/>
         </p:spPr>
         <p:txBody>
-          <a:bodyPr wrap="none">
-            <a:spAutoFit/>
-          </a:bodyPr>
-          <a:lstStyle/>
-          <a:p>
-            <a:r>
-              <a:rPr sz="2400" b="1">
+          <a:bodyPr wrap="square"/>
+          <a:lstStyle/>
+          <a:p>
+            <a:pPr algn="l">
+              <a:spcBef>
+                <a:spcPts val="0"/>
+              </a:spcBef>
+              <a:spcAft>
+                <a:spcPts val="0"/>
+              </a:spcAft>
+            </a:pPr>
+            <a:r>
+              <a:rPr sz="2200" b="1">
                 <a:solidFill>
-                  <a:srgbClr val="0B3D91"/>
+                  <a:srgbClr val="1B2A4A"/>
                 </a:solidFill>
+                <a:latin typeface="Calibri"/>
               </a:rPr>
               <a:t>[7/15] Risques</a:t>
+            </a:r>
+          </a:p>
+        </p:txBody>
+      </p:sp>
+      <p:sp>
+        <p:nvSpPr>
+          <p:cNvPr id="6" name="Rectangle 5"/>
+          <p:cNvSpPr/>
+          <p:nvPr/>
+        </p:nvSpPr>
+        <p:spPr>
+          <a:xfrm>
+            <a:off x="822960" y="1042415"/>
+            <a:ext cx="10058400" cy="18288"/>
+          </a:xfrm>
+          <a:prstGeom prst="rect">
+            <a:avLst/>
+          </a:prstGeom>
+          <a:solidFill>
+            <a:srgbClr val="6C757D"/>
+          </a:solidFill>
+          <a:ln>
+            <a:noFill/>
+          </a:ln>
+        </p:spPr>
+        <p:style>
+          <a:lnRef idx="1">
+            <a:schemeClr val="accent1"/>
+          </a:lnRef>
+          <a:fillRef idx="3">
+            <a:schemeClr val="accent1"/>
+          </a:fillRef>
+          <a:effectRef idx="2">
+            <a:schemeClr val="accent1"/>
+          </a:effectRef>
+          <a:fontRef idx="minor">
+            <a:schemeClr val="lt1"/>
+          </a:fontRef>
+        </p:style>
+        <p:txBody>
+          <a:bodyPr rtlCol="0" anchor="ctr"/>
+          <a:lstStyle/>
+          <a:p>
+            <a:pPr algn="ctr"/>
+          </a:p>
+        </p:txBody>
+      </p:sp>
+      <p:sp>
+        <p:nvSpPr>
+          <p:cNvPr id="7" name="Rectangle 6"/>
+          <p:cNvSpPr/>
+          <p:nvPr/>
+        </p:nvSpPr>
+        <p:spPr>
+          <a:xfrm>
+            <a:off x="822960" y="6446520"/>
+            <a:ext cx="10515600" cy="9144"/>
+          </a:xfrm>
+          <a:prstGeom prst="rect">
+            <a:avLst/>
+          </a:prstGeom>
+          <a:solidFill>
+            <a:srgbClr val="6C757D"/>
+          </a:solidFill>
+          <a:ln>
+            <a:noFill/>
+          </a:ln>
+        </p:spPr>
+        <p:style>
+          <a:lnRef idx="1">
+            <a:schemeClr val="accent1"/>
+          </a:lnRef>
+          <a:fillRef idx="3">
+            <a:schemeClr val="accent1"/>
+          </a:fillRef>
+          <a:effectRef idx="2">
+            <a:schemeClr val="accent1"/>
+          </a:effectRef>
+          <a:fontRef idx="minor">
+            <a:schemeClr val="lt1"/>
+          </a:fontRef>
+        </p:style>
+        <p:txBody>
+          <a:bodyPr rtlCol="0" anchor="ctr"/>
+          <a:lstStyle/>
+          <a:p>
+            <a:pPr algn="ctr"/>
+          </a:p>
+        </p:txBody>
+      </p:sp>
+      <p:sp>
+        <p:nvSpPr>
+          <p:cNvPr id="8" name="TextBox 7"/>
+          <p:cNvSpPr txBox="1"/>
+          <p:nvPr/>
+        </p:nvSpPr>
+        <p:spPr>
+          <a:xfrm>
+            <a:off x="11155680" y="6492240"/>
+            <a:ext cx="731520" cy="274320"/>
+          </a:xfrm>
+          <a:prstGeom prst="rect">
+            <a:avLst/>
+          </a:prstGeom>
+          <a:noFill/>
+        </p:spPr>
+        <p:txBody>
+          <a:bodyPr wrap="square"/>
+          <a:lstStyle/>
+          <a:p>
+            <a:pPr algn="r">
+              <a:spcBef>
+                <a:spcPts val="0"/>
+              </a:spcBef>
+              <a:spcAft>
+                <a:spcPts val="0"/>
+              </a:spcAft>
+            </a:pPr>
+            <a:r>
+              <a:rPr sz="900" b="0">
+                <a:solidFill>
+                  <a:srgbClr val="6C757D"/>
+                </a:solidFill>
+                <a:latin typeface="Calibri"/>
+              </a:rPr>
+              <a:t>7/15</a:t>
+            </a:r>
+          </a:p>
+        </p:txBody>
+      </p:sp>
+      <p:sp>
+        <p:nvSpPr>
+          <p:cNvPr id="9" name="TextBox 8"/>
+          <p:cNvSpPr txBox="1"/>
+          <p:nvPr/>
+        </p:nvSpPr>
+        <p:spPr>
+          <a:xfrm>
+            <a:off x="822960" y="6492240"/>
+            <a:ext cx="2743200" cy="274320"/>
+          </a:xfrm>
+          <a:prstGeom prst="rect">
+            <a:avLst/>
+          </a:prstGeom>
+          <a:noFill/>
+        </p:spPr>
+        <p:txBody>
+          <a:bodyPr wrap="square"/>
+          <a:lstStyle/>
+          <a:p>
+            <a:pPr algn="l">
+              <a:spcBef>
+                <a:spcPts val="0"/>
+              </a:spcBef>
+              <a:spcAft>
+                <a:spcPts val="0"/>
+              </a:spcAft>
+            </a:pPr>
+            <a:r>
+              <a:rPr sz="800" b="0">
+                <a:solidFill>
+                  <a:srgbClr val="6C757D"/>
+                </a:solidFill>
+                <a:latin typeface="Calibri"/>
+              </a:rPr>
+              <a:t>CONFIDENTIEL</a:t>
             </a:r>
           </a:p>
         </p:txBody>
@@ -3767,14 +7524,143 @@
       <p:grpSpPr/>
       <p:sp>
         <p:nvSpPr>
-          <p:cNvPr id="2" name="TextBox 1"/>
+          <p:cNvPr id="2" name="Rectangle 1"/>
+          <p:cNvSpPr/>
+          <p:nvPr/>
+        </p:nvSpPr>
+        <p:spPr>
+          <a:xfrm>
+            <a:off x="0" y="0"/>
+            <a:ext cx="320040" cy="6858000"/>
+          </a:xfrm>
+          <a:prstGeom prst="rect">
+            <a:avLst/>
+          </a:prstGeom>
+          <a:solidFill>
+            <a:srgbClr val="1B2A4A"/>
+          </a:solidFill>
+          <a:ln>
+            <a:noFill/>
+          </a:ln>
+        </p:spPr>
+        <p:style>
+          <a:lnRef idx="1">
+            <a:schemeClr val="accent1"/>
+          </a:lnRef>
+          <a:fillRef idx="3">
+            <a:schemeClr val="accent1"/>
+          </a:fillRef>
+          <a:effectRef idx="2">
+            <a:schemeClr val="accent1"/>
+          </a:effectRef>
+          <a:fontRef idx="minor">
+            <a:schemeClr val="lt1"/>
+          </a:fontRef>
+        </p:style>
+        <p:txBody>
+          <a:bodyPr rtlCol="0" anchor="ctr"/>
+          <a:lstStyle/>
+          <a:p>
+            <a:pPr algn="ctr"/>
+          </a:p>
+        </p:txBody>
+      </p:sp>
+      <p:sp>
+        <p:nvSpPr>
+          <p:cNvPr id="3" name="Rectangle 2"/>
+          <p:cNvSpPr/>
+          <p:nvPr/>
+        </p:nvSpPr>
+        <p:spPr>
+          <a:xfrm>
+            <a:off x="320040" y="0"/>
+            <a:ext cx="11871655" cy="36576"/>
+          </a:xfrm>
+          <a:prstGeom prst="rect">
+            <a:avLst/>
+          </a:prstGeom>
+          <a:solidFill>
+            <a:srgbClr val="C5A55A"/>
+          </a:solidFill>
+          <a:ln>
+            <a:noFill/>
+          </a:ln>
+        </p:spPr>
+        <p:style>
+          <a:lnRef idx="1">
+            <a:schemeClr val="accent1"/>
+          </a:lnRef>
+          <a:fillRef idx="3">
+            <a:schemeClr val="accent1"/>
+          </a:fillRef>
+          <a:effectRef idx="2">
+            <a:schemeClr val="accent1"/>
+          </a:effectRef>
+          <a:fontRef idx="minor">
+            <a:schemeClr val="lt1"/>
+          </a:fontRef>
+        </p:style>
+        <p:txBody>
+          <a:bodyPr rtlCol="0" anchor="ctr"/>
+          <a:lstStyle/>
+          <a:p>
+            <a:pPr algn="ctr"/>
+          </a:p>
+        </p:txBody>
+      </p:sp>
+      <p:sp>
+        <p:nvSpPr>
+          <p:cNvPr id="4" name="Rectangle 3"/>
+          <p:cNvSpPr/>
+          <p:nvPr/>
+        </p:nvSpPr>
+        <p:spPr>
+          <a:xfrm>
+            <a:off x="320040" y="36576"/>
+            <a:ext cx="11871655" cy="1005840"/>
+          </a:xfrm>
+          <a:prstGeom prst="rect">
+            <a:avLst/>
+          </a:prstGeom>
+          <a:solidFill>
+            <a:srgbClr val="F5F3EF"/>
+          </a:solidFill>
+          <a:ln>
+            <a:noFill/>
+          </a:ln>
+        </p:spPr>
+        <p:style>
+          <a:lnRef idx="1">
+            <a:schemeClr val="accent1"/>
+          </a:lnRef>
+          <a:fillRef idx="3">
+            <a:schemeClr val="accent1"/>
+          </a:fillRef>
+          <a:effectRef idx="2">
+            <a:schemeClr val="accent1"/>
+          </a:effectRef>
+          <a:fontRef idx="minor">
+            <a:schemeClr val="lt1"/>
+          </a:fontRef>
+        </p:style>
+        <p:txBody>
+          <a:bodyPr rtlCol="0" anchor="ctr"/>
+          <a:lstStyle/>
+          <a:p>
+            <a:pPr algn="ctr"/>
+          </a:p>
+        </p:txBody>
+      </p:sp>
+      <p:sp>
+        <p:nvSpPr>
+          <p:cNvPr id="5" name="TextBox 4"/>
           <p:cNvSpPr txBox="1"/>
           <p:nvPr/>
         </p:nvSpPr>
         <p:spPr>
           <a:xfrm>
-            <a:off x="457200" y="365760"/>
-            <a:ext cx="11247120" cy="822960"/>
+            <a:off x="822960" y="164592"/>
+            <a:ext cx="10515600" cy="731520"/>
           </a:xfrm>
           <a:prstGeom prst="rect">
             <a:avLst/>
@@ -3782,18 +7668,191 @@
           <a:noFill/>
         </p:spPr>
         <p:txBody>
-          <a:bodyPr wrap="none">
-            <a:spAutoFit/>
-          </a:bodyPr>
-          <a:lstStyle/>
-          <a:p>
-            <a:r>
-              <a:rPr sz="2400" b="1">
+          <a:bodyPr wrap="square"/>
+          <a:lstStyle/>
+          <a:p>
+            <a:pPr algn="l">
+              <a:spcBef>
+                <a:spcPts val="0"/>
+              </a:spcBef>
+              <a:spcAft>
+                <a:spcPts val="0"/>
+              </a:spcAft>
+            </a:pPr>
+            <a:r>
+              <a:rPr sz="2200" b="1">
                 <a:solidFill>
-                  <a:srgbClr val="0B3D91"/>
+                  <a:srgbClr val="1B2A4A"/>
                 </a:solidFill>
+                <a:latin typeface="Calibri"/>
               </a:rPr>
               <a:t>[8/15] Catalyseurs</a:t>
+            </a:r>
+          </a:p>
+        </p:txBody>
+      </p:sp>
+      <p:sp>
+        <p:nvSpPr>
+          <p:cNvPr id="6" name="Rectangle 5"/>
+          <p:cNvSpPr/>
+          <p:nvPr/>
+        </p:nvSpPr>
+        <p:spPr>
+          <a:xfrm>
+            <a:off x="822960" y="1042415"/>
+            <a:ext cx="10058400" cy="18288"/>
+          </a:xfrm>
+          <a:prstGeom prst="rect">
+            <a:avLst/>
+          </a:prstGeom>
+          <a:solidFill>
+            <a:srgbClr val="6C757D"/>
+          </a:solidFill>
+          <a:ln>
+            <a:noFill/>
+          </a:ln>
+        </p:spPr>
+        <p:style>
+          <a:lnRef idx="1">
+            <a:schemeClr val="accent1"/>
+          </a:lnRef>
+          <a:fillRef idx="3">
+            <a:schemeClr val="accent1"/>
+          </a:fillRef>
+          <a:effectRef idx="2">
+            <a:schemeClr val="accent1"/>
+          </a:effectRef>
+          <a:fontRef idx="minor">
+            <a:schemeClr val="lt1"/>
+          </a:fontRef>
+        </p:style>
+        <p:txBody>
+          <a:bodyPr rtlCol="0" anchor="ctr"/>
+          <a:lstStyle/>
+          <a:p>
+            <a:pPr algn="ctr"/>
+          </a:p>
+        </p:txBody>
+      </p:sp>
+      <p:sp>
+        <p:nvSpPr>
+          <p:cNvPr id="7" name="Rectangle 6"/>
+          <p:cNvSpPr/>
+          <p:nvPr/>
+        </p:nvSpPr>
+        <p:spPr>
+          <a:xfrm>
+            <a:off x="822960" y="6446520"/>
+            <a:ext cx="10515600" cy="9144"/>
+          </a:xfrm>
+          <a:prstGeom prst="rect">
+            <a:avLst/>
+          </a:prstGeom>
+          <a:solidFill>
+            <a:srgbClr val="6C757D"/>
+          </a:solidFill>
+          <a:ln>
+            <a:noFill/>
+          </a:ln>
+        </p:spPr>
+        <p:style>
+          <a:lnRef idx="1">
+            <a:schemeClr val="accent1"/>
+          </a:lnRef>
+          <a:fillRef idx="3">
+            <a:schemeClr val="accent1"/>
+          </a:fillRef>
+          <a:effectRef idx="2">
+            <a:schemeClr val="accent1"/>
+          </a:effectRef>
+          <a:fontRef idx="minor">
+            <a:schemeClr val="lt1"/>
+          </a:fontRef>
+        </p:style>
+        <p:txBody>
+          <a:bodyPr rtlCol="0" anchor="ctr"/>
+          <a:lstStyle/>
+          <a:p>
+            <a:pPr algn="ctr"/>
+          </a:p>
+        </p:txBody>
+      </p:sp>
+      <p:sp>
+        <p:nvSpPr>
+          <p:cNvPr id="8" name="TextBox 7"/>
+          <p:cNvSpPr txBox="1"/>
+          <p:nvPr/>
+        </p:nvSpPr>
+        <p:spPr>
+          <a:xfrm>
+            <a:off x="11155680" y="6492240"/>
+            <a:ext cx="731520" cy="274320"/>
+          </a:xfrm>
+          <a:prstGeom prst="rect">
+            <a:avLst/>
+          </a:prstGeom>
+          <a:noFill/>
+        </p:spPr>
+        <p:txBody>
+          <a:bodyPr wrap="square"/>
+          <a:lstStyle/>
+          <a:p>
+            <a:pPr algn="r">
+              <a:spcBef>
+                <a:spcPts val="0"/>
+              </a:spcBef>
+              <a:spcAft>
+                <a:spcPts val="0"/>
+              </a:spcAft>
+            </a:pPr>
+            <a:r>
+              <a:rPr sz="900" b="0">
+                <a:solidFill>
+                  <a:srgbClr val="6C757D"/>
+                </a:solidFill>
+                <a:latin typeface="Calibri"/>
+              </a:rPr>
+              <a:t>8/15</a:t>
+            </a:r>
+          </a:p>
+        </p:txBody>
+      </p:sp>
+      <p:sp>
+        <p:nvSpPr>
+          <p:cNvPr id="9" name="TextBox 8"/>
+          <p:cNvSpPr txBox="1"/>
+          <p:nvPr/>
+        </p:nvSpPr>
+        <p:spPr>
+          <a:xfrm>
+            <a:off x="822960" y="6492240"/>
+            <a:ext cx="2743200" cy="274320"/>
+          </a:xfrm>
+          <a:prstGeom prst="rect">
+            <a:avLst/>
+          </a:prstGeom>
+          <a:noFill/>
+        </p:spPr>
+        <p:txBody>
+          <a:bodyPr wrap="square"/>
+          <a:lstStyle/>
+          <a:p>
+            <a:pPr algn="l">
+              <a:spcBef>
+                <a:spcPts val="0"/>
+              </a:spcBef>
+              <a:spcAft>
+                <a:spcPts val="0"/>
+              </a:spcAft>
+            </a:pPr>
+            <a:r>
+              <a:rPr sz="800" b="0">
+                <a:solidFill>
+                  <a:srgbClr val="6C757D"/>
+                </a:solidFill>
+                <a:latin typeface="Calibri"/>
+              </a:rPr>
+              <a:t>CONFIDENTIEL</a:t>
             </a:r>
           </a:p>
         </p:txBody>
@@ -3818,14 +7877,143 @@
       <p:grpSpPr/>
       <p:sp>
         <p:nvSpPr>
-          <p:cNvPr id="2" name="TextBox 1"/>
+          <p:cNvPr id="2" name="Rectangle 1"/>
+          <p:cNvSpPr/>
+          <p:nvPr/>
+        </p:nvSpPr>
+        <p:spPr>
+          <a:xfrm>
+            <a:off x="0" y="0"/>
+            <a:ext cx="320040" cy="6858000"/>
+          </a:xfrm>
+          <a:prstGeom prst="rect">
+            <a:avLst/>
+          </a:prstGeom>
+          <a:solidFill>
+            <a:srgbClr val="1B2A4A"/>
+          </a:solidFill>
+          <a:ln>
+            <a:noFill/>
+          </a:ln>
+        </p:spPr>
+        <p:style>
+          <a:lnRef idx="1">
+            <a:schemeClr val="accent1"/>
+          </a:lnRef>
+          <a:fillRef idx="3">
+            <a:schemeClr val="accent1"/>
+          </a:fillRef>
+          <a:effectRef idx="2">
+            <a:schemeClr val="accent1"/>
+          </a:effectRef>
+          <a:fontRef idx="minor">
+            <a:schemeClr val="lt1"/>
+          </a:fontRef>
+        </p:style>
+        <p:txBody>
+          <a:bodyPr rtlCol="0" anchor="ctr"/>
+          <a:lstStyle/>
+          <a:p>
+            <a:pPr algn="ctr"/>
+          </a:p>
+        </p:txBody>
+      </p:sp>
+      <p:sp>
+        <p:nvSpPr>
+          <p:cNvPr id="3" name="Rectangle 2"/>
+          <p:cNvSpPr/>
+          <p:nvPr/>
+        </p:nvSpPr>
+        <p:spPr>
+          <a:xfrm>
+            <a:off x="320040" y="0"/>
+            <a:ext cx="11871655" cy="36576"/>
+          </a:xfrm>
+          <a:prstGeom prst="rect">
+            <a:avLst/>
+          </a:prstGeom>
+          <a:solidFill>
+            <a:srgbClr val="C5A55A"/>
+          </a:solidFill>
+          <a:ln>
+            <a:noFill/>
+          </a:ln>
+        </p:spPr>
+        <p:style>
+          <a:lnRef idx="1">
+            <a:schemeClr val="accent1"/>
+          </a:lnRef>
+          <a:fillRef idx="3">
+            <a:schemeClr val="accent1"/>
+          </a:fillRef>
+          <a:effectRef idx="2">
+            <a:schemeClr val="accent1"/>
+          </a:effectRef>
+          <a:fontRef idx="minor">
+            <a:schemeClr val="lt1"/>
+          </a:fontRef>
+        </p:style>
+        <p:txBody>
+          <a:bodyPr rtlCol="0" anchor="ctr"/>
+          <a:lstStyle/>
+          <a:p>
+            <a:pPr algn="ctr"/>
+          </a:p>
+        </p:txBody>
+      </p:sp>
+      <p:sp>
+        <p:nvSpPr>
+          <p:cNvPr id="4" name="Rectangle 3"/>
+          <p:cNvSpPr/>
+          <p:nvPr/>
+        </p:nvSpPr>
+        <p:spPr>
+          <a:xfrm>
+            <a:off x="320040" y="36576"/>
+            <a:ext cx="11871655" cy="1005840"/>
+          </a:xfrm>
+          <a:prstGeom prst="rect">
+            <a:avLst/>
+          </a:prstGeom>
+          <a:solidFill>
+            <a:srgbClr val="F5F3EF"/>
+          </a:solidFill>
+          <a:ln>
+            <a:noFill/>
+          </a:ln>
+        </p:spPr>
+        <p:style>
+          <a:lnRef idx="1">
+            <a:schemeClr val="accent1"/>
+          </a:lnRef>
+          <a:fillRef idx="3">
+            <a:schemeClr val="accent1"/>
+          </a:fillRef>
+          <a:effectRef idx="2">
+            <a:schemeClr val="accent1"/>
+          </a:effectRef>
+          <a:fontRef idx="minor">
+            <a:schemeClr val="lt1"/>
+          </a:fontRef>
+        </p:style>
+        <p:txBody>
+          <a:bodyPr rtlCol="0" anchor="ctr"/>
+          <a:lstStyle/>
+          <a:p>
+            <a:pPr algn="ctr"/>
+          </a:p>
+        </p:txBody>
+      </p:sp>
+      <p:sp>
+        <p:nvSpPr>
+          <p:cNvPr id="5" name="TextBox 4"/>
           <p:cNvSpPr txBox="1"/>
           <p:nvPr/>
         </p:nvSpPr>
         <p:spPr>
           <a:xfrm>
-            <a:off x="457200" y="365760"/>
-            <a:ext cx="11247120" cy="822960"/>
+            <a:off x="822960" y="164592"/>
+            <a:ext cx="10515600" cy="731520"/>
           </a:xfrm>
           <a:prstGeom prst="rect">
             <a:avLst/>
@@ -3833,18 +8021,191 @@
           <a:noFill/>
         </p:spPr>
         <p:txBody>
-          <a:bodyPr wrap="none">
-            <a:spAutoFit/>
-          </a:bodyPr>
-          <a:lstStyle/>
-          <a:p>
-            <a:r>
-              <a:rPr sz="2400" b="1">
+          <a:bodyPr wrap="square"/>
+          <a:lstStyle/>
+          <a:p>
+            <a:pPr algn="l">
+              <a:spcBef>
+                <a:spcPts val="0"/>
+              </a:spcBef>
+              <a:spcAft>
+                <a:spcPts val="0"/>
+              </a:spcAft>
+            </a:pPr>
+            <a:r>
+              <a:rPr sz="2200" b="1">
                 <a:solidFill>
-                  <a:srgbClr val="0B3D91"/>
+                  <a:srgbClr val="1B2A4A"/>
                 </a:solidFill>
+                <a:latin typeface="Calibri"/>
               </a:rPr>
               <a:t>[9/15] Scénarios</a:t>
+            </a:r>
+          </a:p>
+        </p:txBody>
+      </p:sp>
+      <p:sp>
+        <p:nvSpPr>
+          <p:cNvPr id="6" name="Rectangle 5"/>
+          <p:cNvSpPr/>
+          <p:nvPr/>
+        </p:nvSpPr>
+        <p:spPr>
+          <a:xfrm>
+            <a:off x="822960" y="1042415"/>
+            <a:ext cx="10058400" cy="18288"/>
+          </a:xfrm>
+          <a:prstGeom prst="rect">
+            <a:avLst/>
+          </a:prstGeom>
+          <a:solidFill>
+            <a:srgbClr val="6C757D"/>
+          </a:solidFill>
+          <a:ln>
+            <a:noFill/>
+          </a:ln>
+        </p:spPr>
+        <p:style>
+          <a:lnRef idx="1">
+            <a:schemeClr val="accent1"/>
+          </a:lnRef>
+          <a:fillRef idx="3">
+            <a:schemeClr val="accent1"/>
+          </a:fillRef>
+          <a:effectRef idx="2">
+            <a:schemeClr val="accent1"/>
+          </a:effectRef>
+          <a:fontRef idx="minor">
+            <a:schemeClr val="lt1"/>
+          </a:fontRef>
+        </p:style>
+        <p:txBody>
+          <a:bodyPr rtlCol="0" anchor="ctr"/>
+          <a:lstStyle/>
+          <a:p>
+            <a:pPr algn="ctr"/>
+          </a:p>
+        </p:txBody>
+      </p:sp>
+      <p:sp>
+        <p:nvSpPr>
+          <p:cNvPr id="7" name="Rectangle 6"/>
+          <p:cNvSpPr/>
+          <p:nvPr/>
+        </p:nvSpPr>
+        <p:spPr>
+          <a:xfrm>
+            <a:off x="822960" y="6446520"/>
+            <a:ext cx="10515600" cy="9144"/>
+          </a:xfrm>
+          <a:prstGeom prst="rect">
+            <a:avLst/>
+          </a:prstGeom>
+          <a:solidFill>
+            <a:srgbClr val="6C757D"/>
+          </a:solidFill>
+          <a:ln>
+            <a:noFill/>
+          </a:ln>
+        </p:spPr>
+        <p:style>
+          <a:lnRef idx="1">
+            <a:schemeClr val="accent1"/>
+          </a:lnRef>
+          <a:fillRef idx="3">
+            <a:schemeClr val="accent1"/>
+          </a:fillRef>
+          <a:effectRef idx="2">
+            <a:schemeClr val="accent1"/>
+          </a:effectRef>
+          <a:fontRef idx="minor">
+            <a:schemeClr val="lt1"/>
+          </a:fontRef>
+        </p:style>
+        <p:txBody>
+          <a:bodyPr rtlCol="0" anchor="ctr"/>
+          <a:lstStyle/>
+          <a:p>
+            <a:pPr algn="ctr"/>
+          </a:p>
+        </p:txBody>
+      </p:sp>
+      <p:sp>
+        <p:nvSpPr>
+          <p:cNvPr id="8" name="TextBox 7"/>
+          <p:cNvSpPr txBox="1"/>
+          <p:nvPr/>
+        </p:nvSpPr>
+        <p:spPr>
+          <a:xfrm>
+            <a:off x="11155680" y="6492240"/>
+            <a:ext cx="731520" cy="274320"/>
+          </a:xfrm>
+          <a:prstGeom prst="rect">
+            <a:avLst/>
+          </a:prstGeom>
+          <a:noFill/>
+        </p:spPr>
+        <p:txBody>
+          <a:bodyPr wrap="square"/>
+          <a:lstStyle/>
+          <a:p>
+            <a:pPr algn="r">
+              <a:spcBef>
+                <a:spcPts val="0"/>
+              </a:spcBef>
+              <a:spcAft>
+                <a:spcPts val="0"/>
+              </a:spcAft>
+            </a:pPr>
+            <a:r>
+              <a:rPr sz="900" b="0">
+                <a:solidFill>
+                  <a:srgbClr val="6C757D"/>
+                </a:solidFill>
+                <a:latin typeface="Calibri"/>
+              </a:rPr>
+              <a:t>9/15</a:t>
+            </a:r>
+          </a:p>
+        </p:txBody>
+      </p:sp>
+      <p:sp>
+        <p:nvSpPr>
+          <p:cNvPr id="9" name="TextBox 8"/>
+          <p:cNvSpPr txBox="1"/>
+          <p:nvPr/>
+        </p:nvSpPr>
+        <p:spPr>
+          <a:xfrm>
+            <a:off x="822960" y="6492240"/>
+            <a:ext cx="2743200" cy="274320"/>
+          </a:xfrm>
+          <a:prstGeom prst="rect">
+            <a:avLst/>
+          </a:prstGeom>
+          <a:noFill/>
+        </p:spPr>
+        <p:txBody>
+          <a:bodyPr wrap="square"/>
+          <a:lstStyle/>
+          <a:p>
+            <a:pPr algn="l">
+              <a:spcBef>
+                <a:spcPts val="0"/>
+              </a:spcBef>
+              <a:spcAft>
+                <a:spcPts val="0"/>
+              </a:spcAft>
+            </a:pPr>
+            <a:r>
+              <a:rPr sz="800" b="0">
+                <a:solidFill>
+                  <a:srgbClr val="6C757D"/>
+                </a:solidFill>
+                <a:latin typeface="Calibri"/>
+              </a:rPr>
+              <a:t>CONFIDENTIEL</a:t>
             </a:r>
           </a:p>
         </p:txBody>
